--- a/架构图.pptx
+++ b/架构图.pptx
@@ -259,7 +259,7 @@
           <a:p>
             <a:fld id="{D6C62C4D-D056-4B4F-8CEF-42E495CFF63F}" type="datetimeFigureOut">
               <a:rPr lang="zh-CN" altLang="en-US" smtClean="0"/>
-              <a:t>2026/8/7</a:t>
+              <a:t>2026/8/8</a:t>
             </a:fld>
             <a:endParaRPr lang="zh-CN" altLang="en-US"/>
           </a:p>
@@ -457,7 +457,7 @@
           <a:p>
             <a:fld id="{D6C62C4D-D056-4B4F-8CEF-42E495CFF63F}" type="datetimeFigureOut">
               <a:rPr lang="zh-CN" altLang="en-US" smtClean="0"/>
-              <a:t>2026/8/7</a:t>
+              <a:t>2026/8/8</a:t>
             </a:fld>
             <a:endParaRPr lang="zh-CN" altLang="en-US"/>
           </a:p>
@@ -665,7 +665,7 @@
           <a:p>
             <a:fld id="{D6C62C4D-D056-4B4F-8CEF-42E495CFF63F}" type="datetimeFigureOut">
               <a:rPr lang="zh-CN" altLang="en-US" smtClean="0"/>
-              <a:t>2026/8/7</a:t>
+              <a:t>2026/8/8</a:t>
             </a:fld>
             <a:endParaRPr lang="zh-CN" altLang="en-US"/>
           </a:p>
@@ -863,7 +863,7 @@
           <a:p>
             <a:fld id="{D6C62C4D-D056-4B4F-8CEF-42E495CFF63F}" type="datetimeFigureOut">
               <a:rPr lang="zh-CN" altLang="en-US" smtClean="0"/>
-              <a:t>2026/8/7</a:t>
+              <a:t>2026/8/8</a:t>
             </a:fld>
             <a:endParaRPr lang="zh-CN" altLang="en-US"/>
           </a:p>
@@ -1138,7 +1138,7 @@
           <a:p>
             <a:fld id="{D6C62C4D-D056-4B4F-8CEF-42E495CFF63F}" type="datetimeFigureOut">
               <a:rPr lang="zh-CN" altLang="en-US" smtClean="0"/>
-              <a:t>2026/8/7</a:t>
+              <a:t>2026/8/8</a:t>
             </a:fld>
             <a:endParaRPr lang="zh-CN" altLang="en-US"/>
           </a:p>
@@ -1403,7 +1403,7 @@
           <a:p>
             <a:fld id="{D6C62C4D-D056-4B4F-8CEF-42E495CFF63F}" type="datetimeFigureOut">
               <a:rPr lang="zh-CN" altLang="en-US" smtClean="0"/>
-              <a:t>2026/8/7</a:t>
+              <a:t>2026/8/8</a:t>
             </a:fld>
             <a:endParaRPr lang="zh-CN" altLang="en-US"/>
           </a:p>
@@ -1815,7 +1815,7 @@
           <a:p>
             <a:fld id="{D6C62C4D-D056-4B4F-8CEF-42E495CFF63F}" type="datetimeFigureOut">
               <a:rPr lang="zh-CN" altLang="en-US" smtClean="0"/>
-              <a:t>2026/8/7</a:t>
+              <a:t>2026/8/8</a:t>
             </a:fld>
             <a:endParaRPr lang="zh-CN" altLang="en-US"/>
           </a:p>
@@ -1956,7 +1956,7 @@
           <a:p>
             <a:fld id="{D6C62C4D-D056-4B4F-8CEF-42E495CFF63F}" type="datetimeFigureOut">
               <a:rPr lang="zh-CN" altLang="en-US" smtClean="0"/>
-              <a:t>2026/8/7</a:t>
+              <a:t>2026/8/8</a:t>
             </a:fld>
             <a:endParaRPr lang="zh-CN" altLang="en-US"/>
           </a:p>
@@ -2069,7 +2069,7 @@
           <a:p>
             <a:fld id="{D6C62C4D-D056-4B4F-8CEF-42E495CFF63F}" type="datetimeFigureOut">
               <a:rPr lang="zh-CN" altLang="en-US" smtClean="0"/>
-              <a:t>2026/8/7</a:t>
+              <a:t>2026/8/8</a:t>
             </a:fld>
             <a:endParaRPr lang="zh-CN" altLang="en-US"/>
           </a:p>
@@ -2380,7 +2380,7 @@
           <a:p>
             <a:fld id="{D6C62C4D-D056-4B4F-8CEF-42E495CFF63F}" type="datetimeFigureOut">
               <a:rPr lang="zh-CN" altLang="en-US" smtClean="0"/>
-              <a:t>2026/8/7</a:t>
+              <a:t>2026/8/8</a:t>
             </a:fld>
             <a:endParaRPr lang="zh-CN" altLang="en-US"/>
           </a:p>
@@ -2668,7 +2668,7 @@
           <a:p>
             <a:fld id="{D6C62C4D-D056-4B4F-8CEF-42E495CFF63F}" type="datetimeFigureOut">
               <a:rPr lang="zh-CN" altLang="en-US" smtClean="0"/>
-              <a:t>2026/8/7</a:t>
+              <a:t>2026/8/8</a:t>
             </a:fld>
             <a:endParaRPr lang="zh-CN" altLang="en-US"/>
           </a:p>
@@ -2909,7 +2909,7 @@
           <a:p>
             <a:fld id="{D6C62C4D-D056-4B4F-8CEF-42E495CFF63F}" type="datetimeFigureOut">
               <a:rPr lang="zh-CN" altLang="en-US" smtClean="0"/>
-              <a:t>2026/8/7</a:t>
+              <a:t>2026/8/8</a:t>
             </a:fld>
             <a:endParaRPr lang="zh-CN" altLang="en-US"/>
           </a:p>
@@ -3328,10 +3328,10 @@
       </p:grpSpPr>
       <p:sp>
         <p:nvSpPr>
-          <p:cNvPr id="58" name="矩形: 圆角 57">
-            <a:extLst>
-              <a:ext uri="{FF2B5EF4-FFF2-40B4-BE49-F238E27FC236}">
-                <a16:creationId xmlns:a16="http://schemas.microsoft.com/office/drawing/2014/main" id="{D5E6F1DC-65BE-9917-E2B1-75706AC5B587}"/>
+          <p:cNvPr id="12" name="矩形: 圆角 11">
+            <a:extLst>
+              <a:ext uri="{FF2B5EF4-FFF2-40B4-BE49-F238E27FC236}">
+                <a16:creationId xmlns:a16="http://schemas.microsoft.com/office/drawing/2014/main" id="{1AD4258D-63BF-3002-BF79-35285CE47D3B}"/>
               </a:ext>
             </a:extLst>
           </p:cNvPr>
@@ -3340,8 +3340,59 @@
         </p:nvSpPr>
         <p:spPr>
           <a:xfrm>
-            <a:off x="5893354" y="1688345"/>
-            <a:ext cx="1071260" cy="1577749"/>
+            <a:off x="847135" y="2430266"/>
+            <a:ext cx="480108" cy="1987484"/>
+          </a:xfrm>
+          <a:prstGeom prst="roundRect">
+            <a:avLst/>
+          </a:prstGeom>
+          <a:solidFill>
+            <a:schemeClr val="bg1">
+              <a:lumMod val="85000"/>
+            </a:schemeClr>
+          </a:solidFill>
+        </p:spPr>
+        <p:style>
+          <a:lnRef idx="2">
+            <a:schemeClr val="accent1">
+              <a:shade val="15000"/>
+            </a:schemeClr>
+          </a:lnRef>
+          <a:fillRef idx="1">
+            <a:schemeClr val="accent1"/>
+          </a:fillRef>
+          <a:effectRef idx="0">
+            <a:schemeClr val="accent1"/>
+          </a:effectRef>
+          <a:fontRef idx="minor">
+            <a:schemeClr val="lt1"/>
+          </a:fontRef>
+        </p:style>
+        <p:txBody>
+          <a:bodyPr rtlCol="0" anchor="ctr"/>
+          <a:lstStyle/>
+          <a:p>
+            <a:pPr algn="ctr"/>
+            <a:endParaRPr lang="zh-CN" altLang="en-US"/>
+          </a:p>
+        </p:txBody>
+      </p:sp>
+      <p:sp>
+        <p:nvSpPr>
+          <p:cNvPr id="58" name="矩形: 圆角 57">
+            <a:extLst>
+              <a:ext uri="{FF2B5EF4-FFF2-40B4-BE49-F238E27FC236}">
+                <a16:creationId xmlns:a16="http://schemas.microsoft.com/office/drawing/2014/main" id="{D5E6F1DC-65BE-9917-E2B1-75706AC5B587}"/>
+              </a:ext>
+            </a:extLst>
+          </p:cNvPr>
+          <p:cNvSpPr/>
+          <p:nvPr/>
+        </p:nvSpPr>
+        <p:spPr>
+          <a:xfrm>
+            <a:off x="5828124" y="1616422"/>
+            <a:ext cx="1295187" cy="1577749"/>
           </a:xfrm>
           <a:prstGeom prst="roundRect">
             <a:avLst/>
@@ -3382,6 +3433,16 @@
           <a:p>
             <a:pPr algn="ctr"/>
             <a:r>
+              <a:rPr lang="en-US" altLang="zh-CN" sz="1200" dirty="0" err="1">
+                <a:solidFill>
+                  <a:schemeClr val="tx1"/>
+                </a:solidFill>
+                <a:latin typeface="Cambria" panose="02040503050406030204" pitchFamily="18" charset="0"/>
+                <a:ea typeface="Cambria" panose="02040503050406030204" pitchFamily="18" charset="0"/>
+              </a:rPr>
+              <a:t>pLDDT</a:t>
+            </a:r>
+            <a:r>
               <a:rPr lang="en-US" altLang="zh-CN" sz="1200" dirty="0">
                 <a:solidFill>
                   <a:schemeClr val="tx1"/>
@@ -3389,7 +3450,7 @@
                 <a:latin typeface="Cambria" panose="02040503050406030204" pitchFamily="18" charset="0"/>
                 <a:ea typeface="Cambria" panose="02040503050406030204" pitchFamily="18" charset="0"/>
               </a:rPr>
-              <a:t>Multi-scale information extraction</a:t>
+              <a:t>-aware Multi-scale information extraction</a:t>
             </a:r>
             <a:endParaRPr lang="zh-CN" altLang="en-US" sz="1200" dirty="0">
               <a:solidFill>
@@ -3520,7 +3581,7 @@
         </p:nvSpPr>
         <p:spPr>
           <a:xfrm>
-            <a:off x="1014420" y="2443541"/>
+            <a:off x="976480" y="2574670"/>
             <a:ext cx="202976" cy="210810"/>
           </a:xfrm>
           <a:prstGeom prst="ellipse">
@@ -3587,7 +3648,7 @@
         </p:nvSpPr>
         <p:spPr>
           <a:xfrm>
-            <a:off x="1014420" y="2650625"/>
+            <a:off x="976480" y="2781754"/>
             <a:ext cx="202976" cy="210810"/>
           </a:xfrm>
           <a:prstGeom prst="ellipse">
@@ -3653,7 +3714,7 @@
         </p:nvSpPr>
         <p:spPr>
           <a:xfrm>
-            <a:off x="1014422" y="2860463"/>
+            <a:off x="976482" y="2991592"/>
             <a:ext cx="202976" cy="210810"/>
           </a:xfrm>
           <a:prstGeom prst="ellipse">
@@ -3720,7 +3781,7 @@
         </p:nvSpPr>
         <p:spPr>
           <a:xfrm>
-            <a:off x="885075" y="3093133"/>
+            <a:off x="847135" y="3224262"/>
             <a:ext cx="461665" cy="828187"/>
           </a:xfrm>
           <a:prstGeom prst="rect">
@@ -3756,7 +3817,7 @@
         </p:nvSpPr>
         <p:spPr>
           <a:xfrm>
-            <a:off x="1014422" y="3498197"/>
+            <a:off x="976482" y="3629326"/>
             <a:ext cx="202976" cy="210810"/>
           </a:xfrm>
           <a:prstGeom prst="ellipse">
@@ -3822,7 +3883,7 @@
         </p:nvSpPr>
         <p:spPr>
           <a:xfrm>
-            <a:off x="1014420" y="3714311"/>
+            <a:off x="976480" y="3845440"/>
             <a:ext cx="202976" cy="210810"/>
           </a:xfrm>
           <a:prstGeom prst="ellipse">
@@ -3889,7 +3950,7 @@
         </p:nvSpPr>
         <p:spPr>
           <a:xfrm>
-            <a:off x="1014420" y="3925121"/>
+            <a:off x="976480" y="4056250"/>
             <a:ext cx="202976" cy="210810"/>
           </a:xfrm>
           <a:prstGeom prst="ellipse">
@@ -3944,57 +4005,6 @@
       </p:sp>
       <p:sp>
         <p:nvSpPr>
-          <p:cNvPr id="13" name="左大括号 12">
-            <a:extLst>
-              <a:ext uri="{FF2B5EF4-FFF2-40B4-BE49-F238E27FC236}">
-                <a16:creationId xmlns:a16="http://schemas.microsoft.com/office/drawing/2014/main" id="{E00884EA-CA26-072E-0B62-CE157DD94EA2}"/>
-              </a:ext>
-            </a:extLst>
-          </p:cNvPr>
-          <p:cNvSpPr/>
-          <p:nvPr/>
-        </p:nvSpPr>
-        <p:spPr>
-          <a:xfrm>
-            <a:off x="885075" y="2515600"/>
-            <a:ext cx="73369" cy="1546860"/>
-          </a:xfrm>
-          <a:prstGeom prst="leftBrace">
-            <a:avLst/>
-          </a:prstGeom>
-          <a:effectLst>
-            <a:outerShdw blurRad="50800" dist="38100" dir="5400000" algn="t" rotWithShape="0">
-              <a:prstClr val="black">
-                <a:alpha val="40000"/>
-              </a:prstClr>
-            </a:outerShdw>
-          </a:effectLst>
-        </p:spPr>
-        <p:style>
-          <a:lnRef idx="2">
-            <a:schemeClr val="accent1"/>
-          </a:lnRef>
-          <a:fillRef idx="0">
-            <a:schemeClr val="accent1"/>
-          </a:fillRef>
-          <a:effectRef idx="1">
-            <a:schemeClr val="accent1"/>
-          </a:effectRef>
-          <a:fontRef idx="minor">
-            <a:schemeClr val="tx1"/>
-          </a:fontRef>
-        </p:style>
-        <p:txBody>
-          <a:bodyPr rtlCol="0" anchor="ctr"/>
-          <a:lstStyle/>
-          <a:p>
-            <a:pPr algn="ctr"/>
-            <a:endParaRPr lang="zh-CN" altLang="en-US"/>
-          </a:p>
-        </p:txBody>
-      </p:sp>
-      <p:sp>
-        <p:nvSpPr>
           <p:cNvPr id="14" name="文本框 13">
             <a:extLst>
               <a:ext uri="{FF2B5EF4-FFF2-40B4-BE49-F238E27FC236}">
@@ -4007,7 +4017,7 @@
         </p:nvSpPr>
         <p:spPr>
           <a:xfrm>
-            <a:off x="196881" y="3121223"/>
+            <a:off x="747453" y="4369651"/>
             <a:ext cx="724878" cy="307777"/>
           </a:xfrm>
           <a:prstGeom prst="rect">
@@ -4050,9 +4060,9 @@
           <p:nvPr/>
         </p:nvCxnSpPr>
         <p:spPr>
-          <a:xfrm flipV="1">
-            <a:off x="1408396" y="2610218"/>
-            <a:ext cx="577802" cy="40407"/>
+          <a:xfrm>
+            <a:off x="1402868" y="2610218"/>
+            <a:ext cx="583330" cy="0"/>
           </a:xfrm>
           <a:prstGeom prst="straightConnector1">
             <a:avLst/>
@@ -4093,8 +4103,8 @@
         </p:nvCxnSpPr>
         <p:spPr>
           <a:xfrm>
-            <a:off x="1249792" y="3911437"/>
-            <a:ext cx="577802" cy="31743"/>
+            <a:off x="1426925" y="4305493"/>
+            <a:ext cx="389540" cy="302"/>
           </a:xfrm>
           <a:prstGeom prst="straightConnector1">
             <a:avLst/>
@@ -4268,7 +4278,7 @@
         <p:spPr>
           <a:xfrm>
             <a:off x="3127882" y="2645337"/>
-            <a:ext cx="585126" cy="101576"/>
+            <a:ext cx="626913" cy="5288"/>
           </a:xfrm>
           <a:prstGeom prst="straightConnector1">
             <a:avLst/>
@@ -4309,7 +4319,7 @@
         <p:spPr>
           <a:xfrm>
             <a:off x="3205817" y="2487960"/>
-            <a:ext cx="598853" cy="99225"/>
+            <a:ext cx="631474" cy="16872"/>
           </a:xfrm>
           <a:prstGeom prst="straightConnector1">
             <a:avLst/>
@@ -4350,7 +4360,7 @@
         <p:spPr>
           <a:xfrm>
             <a:off x="3270125" y="2364579"/>
-            <a:ext cx="656505" cy="97344"/>
+            <a:ext cx="679540" cy="0"/>
           </a:xfrm>
           <a:prstGeom prst="straightConnector1">
             <a:avLst/>
@@ -4388,8 +4398,8 @@
         </p:nvSpPr>
         <p:spPr>
           <a:xfrm>
-            <a:off x="1827594" y="3691574"/>
-            <a:ext cx="1512374" cy="503212"/>
+            <a:off x="1816465" y="4054189"/>
+            <a:ext cx="1270674" cy="503212"/>
           </a:xfrm>
           <a:prstGeom prst="roundRect">
             <a:avLst/>
@@ -4430,7 +4440,7 @@
           <a:p>
             <a:pPr algn="ctr"/>
             <a:r>
-              <a:rPr lang="en-US" altLang="zh-CN" sz="1600" dirty="0">
+              <a:rPr lang="en-US" altLang="zh-CN" sz="1400" dirty="0">
                 <a:solidFill>
                   <a:schemeClr val="tx1"/>
                 </a:solidFill>
@@ -4439,7 +4449,7 @@
               </a:rPr>
               <a:t>ProT5+LoRA</a:t>
             </a:r>
-            <a:endParaRPr lang="zh-CN" altLang="en-US" sz="1600" dirty="0">
+            <a:endParaRPr lang="zh-CN" altLang="en-US" sz="1400" dirty="0">
               <a:solidFill>
                 <a:schemeClr val="tx1"/>
               </a:solidFill>
@@ -4465,9 +4475,9 @@
           <p:nvPr/>
         </p:nvCxnSpPr>
         <p:spPr>
-          <a:xfrm flipV="1">
-            <a:off x="3339968" y="3932688"/>
-            <a:ext cx="845599" cy="10492"/>
+          <a:xfrm>
+            <a:off x="3087139" y="4305795"/>
+            <a:ext cx="583880" cy="0"/>
           </a:xfrm>
           <a:prstGeom prst="straightConnector1">
             <a:avLst/>
@@ -4505,8 +4515,8 @@
         </p:nvSpPr>
         <p:spPr>
           <a:xfrm>
-            <a:off x="4185567" y="3615594"/>
-            <a:ext cx="2042160" cy="634188"/>
+            <a:off x="3671019" y="3988701"/>
+            <a:ext cx="1822426" cy="634188"/>
           </a:xfrm>
           <a:prstGeom prst="roundRect">
             <a:avLst/>
@@ -4546,7 +4556,7 @@
           <a:p>
             <a:pPr algn="ctr"/>
             <a:r>
-              <a:rPr lang="en-US" altLang="zh-CN" sz="1600" dirty="0">
+              <a:rPr lang="en-US" altLang="zh-CN" sz="1400" dirty="0">
                 <a:solidFill>
                   <a:schemeClr val="tx1"/>
                 </a:solidFill>
@@ -4556,11 +4566,11 @@
               <a:t>Bidirectional</a:t>
             </a:r>
             <a:r>
-              <a:rPr lang="en-US" altLang="zh-CN" dirty="0"/>
+              <a:rPr lang="en-US" altLang="zh-CN" sz="1600" dirty="0"/>
               <a:t> </a:t>
             </a:r>
             <a:r>
-              <a:rPr lang="en-US" altLang="zh-CN" sz="1600" dirty="0" err="1">
+              <a:rPr lang="en-US" altLang="zh-CN" sz="1400" dirty="0" err="1">
                 <a:solidFill>
                   <a:schemeClr val="tx1"/>
                 </a:solidFill>
@@ -4569,7 +4579,7 @@
               </a:rPr>
               <a:t>Manba</a:t>
             </a:r>
-            <a:endParaRPr lang="zh-CN" altLang="en-US" sz="1600" dirty="0">
+            <a:endParaRPr lang="zh-CN" altLang="en-US" sz="1400" dirty="0">
               <a:solidFill>
                 <a:schemeClr val="tx1"/>
               </a:solidFill>
@@ -4892,16 +4902,15 @@
         </p:nvSpPr>
         <p:spPr>
           <a:xfrm>
-            <a:off x="6661076" y="2803184"/>
+            <a:off x="7687673" y="2765045"/>
             <a:ext cx="1558290" cy="858253"/>
           </a:xfrm>
           <a:prstGeom prst="roundRect">
             <a:avLst/>
           </a:prstGeom>
           <a:solidFill>
-            <a:schemeClr val="accent1">
-              <a:lumMod val="20000"/>
-              <a:lumOff val="80000"/>
+            <a:schemeClr val="bg1">
+              <a:lumMod val="95000"/>
             </a:schemeClr>
           </a:solidFill>
         </p:spPr>
@@ -4957,10 +4966,239 @@
         </p:nvCxnSpPr>
         <p:spPr>
           <a:xfrm>
-            <a:off x="6964614" y="2477220"/>
-            <a:ext cx="475607" cy="325964"/>
+            <a:off x="7123311" y="2405297"/>
+            <a:ext cx="1343507" cy="359748"/>
           </a:xfrm>
           <a:prstGeom prst="bentConnector2">
+            <a:avLst/>
+          </a:prstGeom>
+          <a:ln>
+            <a:tailEnd type="triangle"/>
+          </a:ln>
+        </p:spPr>
+        <p:style>
+          <a:lnRef idx="2">
+            <a:schemeClr val="accent1"/>
+          </a:lnRef>
+          <a:fillRef idx="0">
+            <a:schemeClr val="accent1"/>
+          </a:fillRef>
+          <a:effectRef idx="1">
+            <a:schemeClr val="accent1"/>
+          </a:effectRef>
+          <a:fontRef idx="minor">
+            <a:schemeClr val="tx1"/>
+          </a:fontRef>
+        </p:style>
+      </p:cxnSp>
+      <p:sp>
+        <p:nvSpPr>
+          <p:cNvPr id="1077" name="箭头: 右 1076">
+            <a:extLst>
+              <a:ext uri="{FF2B5EF4-FFF2-40B4-BE49-F238E27FC236}">
+                <a16:creationId xmlns:a16="http://schemas.microsoft.com/office/drawing/2014/main" id="{AD25ADFB-0A09-1044-2B9F-A618DC97F13A}"/>
+              </a:ext>
+            </a:extLst>
+          </p:cNvPr>
+          <p:cNvSpPr/>
+          <p:nvPr/>
+        </p:nvSpPr>
+        <p:spPr>
+          <a:xfrm>
+            <a:off x="9352409" y="3095096"/>
+            <a:ext cx="365760" cy="125317"/>
+          </a:xfrm>
+          <a:prstGeom prst="rightArrow">
+            <a:avLst/>
+          </a:prstGeom>
+        </p:spPr>
+        <p:style>
+          <a:lnRef idx="2">
+            <a:schemeClr val="accent1">
+              <a:shade val="15000"/>
+            </a:schemeClr>
+          </a:lnRef>
+          <a:fillRef idx="1">
+            <a:schemeClr val="accent1"/>
+          </a:fillRef>
+          <a:effectRef idx="0">
+            <a:schemeClr val="accent1"/>
+          </a:effectRef>
+          <a:fontRef idx="minor">
+            <a:schemeClr val="lt1"/>
+          </a:fontRef>
+        </p:style>
+        <p:txBody>
+          <a:bodyPr rtlCol="0" anchor="ctr"/>
+          <a:lstStyle/>
+          <a:p>
+            <a:pPr algn="ctr"/>
+            <a:endParaRPr lang="zh-CN" altLang="en-US"/>
+          </a:p>
+        </p:txBody>
+      </p:sp>
+      <p:sp>
+        <p:nvSpPr>
+          <p:cNvPr id="1078" name="矩形: 圆角 1077">
+            <a:extLst>
+              <a:ext uri="{FF2B5EF4-FFF2-40B4-BE49-F238E27FC236}">
+                <a16:creationId xmlns:a16="http://schemas.microsoft.com/office/drawing/2014/main" id="{022E3DED-A6C3-2050-DABD-851EDCF2BD92}"/>
+              </a:ext>
+            </a:extLst>
+          </p:cNvPr>
+          <p:cNvSpPr/>
+          <p:nvPr/>
+        </p:nvSpPr>
+        <p:spPr>
+          <a:xfrm>
+            <a:off x="9824615" y="2430266"/>
+            <a:ext cx="966285" cy="1454976"/>
+          </a:xfrm>
+          <a:prstGeom prst="roundRect">
+            <a:avLst/>
+          </a:prstGeom>
+          <a:solidFill>
+            <a:schemeClr val="accent4">
+              <a:lumMod val="20000"/>
+              <a:lumOff val="80000"/>
+            </a:schemeClr>
+          </a:solidFill>
+        </p:spPr>
+        <p:style>
+          <a:lnRef idx="2">
+            <a:schemeClr val="accent1">
+              <a:shade val="15000"/>
+            </a:schemeClr>
+          </a:lnRef>
+          <a:fillRef idx="1">
+            <a:schemeClr val="accent1"/>
+          </a:fillRef>
+          <a:effectRef idx="0">
+            <a:schemeClr val="accent1"/>
+          </a:effectRef>
+          <a:fontRef idx="minor">
+            <a:schemeClr val="lt1"/>
+          </a:fontRef>
+        </p:style>
+        <p:txBody>
+          <a:bodyPr rtlCol="0" anchor="ctr"/>
+          <a:lstStyle/>
+          <a:p>
+            <a:pPr algn="ctr"/>
+            <a:r>
+              <a:rPr lang="en-US" altLang="zh-CN" sz="1200" dirty="0">
+                <a:solidFill>
+                  <a:schemeClr val="tx1"/>
+                </a:solidFill>
+                <a:latin typeface="Cambria" panose="02040503050406030204" pitchFamily="18" charset="0"/>
+                <a:ea typeface="Cambria" panose="02040503050406030204" pitchFamily="18" charset="0"/>
+              </a:rPr>
+              <a:t>Peptide toxicity prediction</a:t>
+            </a:r>
+            <a:endParaRPr lang="zh-CN" altLang="en-US" sz="1200" dirty="0">
+              <a:solidFill>
+                <a:schemeClr val="tx1"/>
+              </a:solidFill>
+              <a:latin typeface="Cambria" panose="02040503050406030204" pitchFamily="18" charset="0"/>
+            </a:endParaRPr>
+          </a:p>
+        </p:txBody>
+      </p:sp>
+      <p:sp>
+        <p:nvSpPr>
+          <p:cNvPr id="28" name="矩形: 圆角 27">
+            <a:extLst>
+              <a:ext uri="{FF2B5EF4-FFF2-40B4-BE49-F238E27FC236}">
+                <a16:creationId xmlns:a16="http://schemas.microsoft.com/office/drawing/2014/main" id="{D4C861B6-4351-8E8B-E048-1618ED1148BE}"/>
+              </a:ext>
+            </a:extLst>
+          </p:cNvPr>
+          <p:cNvSpPr/>
+          <p:nvPr/>
+        </p:nvSpPr>
+        <p:spPr>
+          <a:xfrm>
+            <a:off x="5837579" y="4053585"/>
+            <a:ext cx="1721956" cy="503816"/>
+          </a:xfrm>
+          <a:prstGeom prst="roundRect">
+            <a:avLst/>
+          </a:prstGeom>
+          <a:solidFill>
+            <a:schemeClr val="accent4">
+              <a:lumMod val="20000"/>
+              <a:lumOff val="80000"/>
+            </a:schemeClr>
+          </a:solidFill>
+          <a:effectLst>
+            <a:outerShdw blurRad="50800" dist="38100" dir="2700000" algn="tl" rotWithShape="0">
+              <a:prstClr val="black">
+                <a:alpha val="40000"/>
+              </a:prstClr>
+            </a:outerShdw>
+          </a:effectLst>
+        </p:spPr>
+        <p:style>
+          <a:lnRef idx="2">
+            <a:schemeClr val="accent1">
+              <a:shade val="15000"/>
+            </a:schemeClr>
+          </a:lnRef>
+          <a:fillRef idx="1">
+            <a:schemeClr val="accent1"/>
+          </a:fillRef>
+          <a:effectRef idx="0">
+            <a:schemeClr val="accent1"/>
+          </a:effectRef>
+          <a:fontRef idx="minor">
+            <a:schemeClr val="lt1"/>
+          </a:fontRef>
+        </p:style>
+        <p:txBody>
+          <a:bodyPr rtlCol="0" anchor="ctr"/>
+          <a:lstStyle/>
+          <a:p>
+            <a:pPr algn="ctr"/>
+            <a:r>
+              <a:rPr lang="en-US" altLang="zh-CN" sz="1400" dirty="0">
+                <a:solidFill>
+                  <a:schemeClr val="tx1"/>
+                </a:solidFill>
+                <a:latin typeface="Cambria" panose="02040503050406030204" pitchFamily="18" charset="0"/>
+                <a:ea typeface="Cambria" panose="02040503050406030204" pitchFamily="18" charset="0"/>
+              </a:rPr>
+              <a:t>3-seed ensemble</a:t>
+            </a:r>
+            <a:endParaRPr lang="zh-CN" altLang="en-US" sz="1400" dirty="0">
+              <a:solidFill>
+                <a:schemeClr val="tx1"/>
+              </a:solidFill>
+              <a:latin typeface="Cambria" panose="02040503050406030204" pitchFamily="18" charset="0"/>
+            </a:endParaRPr>
+          </a:p>
+        </p:txBody>
+      </p:sp>
+      <p:cxnSp>
+        <p:nvCxnSpPr>
+          <p:cNvPr id="44" name="直接箭头连接符 43">
+            <a:extLst>
+              <a:ext uri="{FF2B5EF4-FFF2-40B4-BE49-F238E27FC236}">
+                <a16:creationId xmlns:a16="http://schemas.microsoft.com/office/drawing/2014/main" id="{DBD74BC5-0C34-C54D-9B99-DE54BA962F62}"/>
+              </a:ext>
+            </a:extLst>
+          </p:cNvPr>
+          <p:cNvCxnSpPr>
+            <a:stCxn id="43" idx="3"/>
+            <a:endCxn id="28" idx="1"/>
+          </p:cNvCxnSpPr>
+          <p:nvPr/>
+        </p:nvCxnSpPr>
+        <p:spPr>
+          <a:xfrm flipV="1">
+            <a:off x="5493445" y="4305493"/>
+            <a:ext cx="344134" cy="302"/>
+          </a:xfrm>
+          <a:prstGeom prst="straightConnector1">
             <a:avLst/>
           </a:prstGeom>
           <a:ln>
@@ -4984,23 +5222,23 @@
       </p:cxnSp>
       <p:cxnSp>
         <p:nvCxnSpPr>
-          <p:cNvPr id="1074" name="连接符: 肘形 1073">
-            <a:extLst>
-              <a:ext uri="{FF2B5EF4-FFF2-40B4-BE49-F238E27FC236}">
-                <a16:creationId xmlns:a16="http://schemas.microsoft.com/office/drawing/2014/main" id="{C49EC5A4-0A75-8B65-FF84-ED2E04325476}"/>
+          <p:cNvPr id="52" name="连接符: 肘形 51">
+            <a:extLst>
+              <a:ext uri="{FF2B5EF4-FFF2-40B4-BE49-F238E27FC236}">
+                <a16:creationId xmlns:a16="http://schemas.microsoft.com/office/drawing/2014/main" id="{F3C42501-4A54-1700-2345-A399F8869563}"/>
               </a:ext>
             </a:extLst>
           </p:cNvPr>
           <p:cNvCxnSpPr>
-            <a:stCxn id="43" idx="3"/>
+            <a:stCxn id="28" idx="3"/>
             <a:endCxn id="1045" idx="2"/>
           </p:cNvCxnSpPr>
           <p:nvPr/>
         </p:nvCxnSpPr>
         <p:spPr>
           <a:xfrm flipV="1">
-            <a:off x="6227727" y="3661437"/>
-            <a:ext cx="1212494" cy="271251"/>
+            <a:off x="7559535" y="3623298"/>
+            <a:ext cx="907283" cy="682195"/>
           </a:xfrm>
           <a:prstGeom prst="bentConnector2">
             <a:avLst/>
@@ -5024,118 +5262,6 @@
           </a:fontRef>
         </p:style>
       </p:cxnSp>
-      <p:sp>
-        <p:nvSpPr>
-          <p:cNvPr id="1077" name="箭头: 右 1076">
-            <a:extLst>
-              <a:ext uri="{FF2B5EF4-FFF2-40B4-BE49-F238E27FC236}">
-                <a16:creationId xmlns:a16="http://schemas.microsoft.com/office/drawing/2014/main" id="{AD25ADFB-0A09-1044-2B9F-A618DC97F13A}"/>
-              </a:ext>
-            </a:extLst>
-          </p:cNvPr>
-          <p:cNvSpPr/>
-          <p:nvPr/>
-        </p:nvSpPr>
-        <p:spPr>
-          <a:xfrm>
-            <a:off x="8338625" y="3154766"/>
-            <a:ext cx="365760" cy="125317"/>
-          </a:xfrm>
-          <a:prstGeom prst="rightArrow">
-            <a:avLst/>
-          </a:prstGeom>
-        </p:spPr>
-        <p:style>
-          <a:lnRef idx="2">
-            <a:schemeClr val="accent1">
-              <a:shade val="15000"/>
-            </a:schemeClr>
-          </a:lnRef>
-          <a:fillRef idx="1">
-            <a:schemeClr val="accent1"/>
-          </a:fillRef>
-          <a:effectRef idx="0">
-            <a:schemeClr val="accent1"/>
-          </a:effectRef>
-          <a:fontRef idx="minor">
-            <a:schemeClr val="lt1"/>
-          </a:fontRef>
-        </p:style>
-        <p:txBody>
-          <a:bodyPr rtlCol="0" anchor="ctr"/>
-          <a:lstStyle/>
-          <a:p>
-            <a:pPr algn="ctr"/>
-            <a:endParaRPr lang="zh-CN" altLang="en-US"/>
-          </a:p>
-        </p:txBody>
-      </p:sp>
-      <p:sp>
-        <p:nvSpPr>
-          <p:cNvPr id="1078" name="矩形: 圆角 1077">
-            <a:extLst>
-              <a:ext uri="{FF2B5EF4-FFF2-40B4-BE49-F238E27FC236}">
-                <a16:creationId xmlns:a16="http://schemas.microsoft.com/office/drawing/2014/main" id="{022E3DED-A6C3-2050-DABD-851EDCF2BD92}"/>
-              </a:ext>
-            </a:extLst>
-          </p:cNvPr>
-          <p:cNvSpPr/>
-          <p:nvPr/>
-        </p:nvSpPr>
-        <p:spPr>
-          <a:xfrm>
-            <a:off x="8823644" y="2466344"/>
-            <a:ext cx="966285" cy="1454976"/>
-          </a:xfrm>
-          <a:prstGeom prst="roundRect">
-            <a:avLst/>
-          </a:prstGeom>
-          <a:solidFill>
-            <a:schemeClr val="bg1">
-              <a:lumMod val="95000"/>
-            </a:schemeClr>
-          </a:solidFill>
-        </p:spPr>
-        <p:style>
-          <a:lnRef idx="2">
-            <a:schemeClr val="accent1">
-              <a:shade val="15000"/>
-            </a:schemeClr>
-          </a:lnRef>
-          <a:fillRef idx="1">
-            <a:schemeClr val="accent1"/>
-          </a:fillRef>
-          <a:effectRef idx="0">
-            <a:schemeClr val="accent1"/>
-          </a:effectRef>
-          <a:fontRef idx="minor">
-            <a:schemeClr val="lt1"/>
-          </a:fontRef>
-        </p:style>
-        <p:txBody>
-          <a:bodyPr rtlCol="0" anchor="ctr"/>
-          <a:lstStyle/>
-          <a:p>
-            <a:pPr algn="ctr"/>
-            <a:r>
-              <a:rPr lang="en-US" altLang="zh-CN" sz="1200" dirty="0">
-                <a:solidFill>
-                  <a:schemeClr val="tx1"/>
-                </a:solidFill>
-                <a:latin typeface="Cambria" panose="02040503050406030204" pitchFamily="18" charset="0"/>
-                <a:ea typeface="Cambria" panose="02040503050406030204" pitchFamily="18" charset="0"/>
-              </a:rPr>
-              <a:t>Peptide toxicity prediction</a:t>
-            </a:r>
-            <a:endParaRPr lang="zh-CN" altLang="en-US" sz="1200" dirty="0">
-              <a:solidFill>
-                <a:schemeClr val="tx1"/>
-              </a:solidFill>
-              <a:latin typeface="Cambria" panose="02040503050406030204" pitchFamily="18" charset="0"/>
-            </a:endParaRPr>
-          </a:p>
-        </p:txBody>
-      </p:sp>
     </p:spTree>
     <p:extLst>
       <p:ext uri="{BB962C8B-B14F-4D97-AF65-F5344CB8AC3E}">

--- a/架构图.pptx
+++ b/架构图.pptx
@@ -6,6 +6,7 @@
   </p:sldMasterIdLst>
   <p:sldIdLst>
     <p:sldId id="256" r:id="rId2"/>
+    <p:sldId id="257" r:id="rId3"/>
   </p:sldIdLst>
   <p:sldSz cx="12192000" cy="6858000"/>
   <p:notesSz cx="6858000" cy="9144000"/>
@@ -259,7 +260,7 @@
           <a:p>
             <a:fld id="{D6C62C4D-D056-4B4F-8CEF-42E495CFF63F}" type="datetimeFigureOut">
               <a:rPr lang="zh-CN" altLang="en-US" smtClean="0"/>
-              <a:t>2026/8/8</a:t>
+              <a:t>2026/8/9</a:t>
             </a:fld>
             <a:endParaRPr lang="zh-CN" altLang="en-US"/>
           </a:p>
@@ -457,7 +458,7 @@
           <a:p>
             <a:fld id="{D6C62C4D-D056-4B4F-8CEF-42E495CFF63F}" type="datetimeFigureOut">
               <a:rPr lang="zh-CN" altLang="en-US" smtClean="0"/>
-              <a:t>2026/8/8</a:t>
+              <a:t>2026/8/9</a:t>
             </a:fld>
             <a:endParaRPr lang="zh-CN" altLang="en-US"/>
           </a:p>
@@ -665,7 +666,7 @@
           <a:p>
             <a:fld id="{D6C62C4D-D056-4B4F-8CEF-42E495CFF63F}" type="datetimeFigureOut">
               <a:rPr lang="zh-CN" altLang="en-US" smtClean="0"/>
-              <a:t>2026/8/8</a:t>
+              <a:t>2026/8/9</a:t>
             </a:fld>
             <a:endParaRPr lang="zh-CN" altLang="en-US"/>
           </a:p>
@@ -863,7 +864,7 @@
           <a:p>
             <a:fld id="{D6C62C4D-D056-4B4F-8CEF-42E495CFF63F}" type="datetimeFigureOut">
               <a:rPr lang="zh-CN" altLang="en-US" smtClean="0"/>
-              <a:t>2026/8/8</a:t>
+              <a:t>2026/8/9</a:t>
             </a:fld>
             <a:endParaRPr lang="zh-CN" altLang="en-US"/>
           </a:p>
@@ -1138,7 +1139,7 @@
           <a:p>
             <a:fld id="{D6C62C4D-D056-4B4F-8CEF-42E495CFF63F}" type="datetimeFigureOut">
               <a:rPr lang="zh-CN" altLang="en-US" smtClean="0"/>
-              <a:t>2026/8/8</a:t>
+              <a:t>2026/8/9</a:t>
             </a:fld>
             <a:endParaRPr lang="zh-CN" altLang="en-US"/>
           </a:p>
@@ -1403,7 +1404,7 @@
           <a:p>
             <a:fld id="{D6C62C4D-D056-4B4F-8CEF-42E495CFF63F}" type="datetimeFigureOut">
               <a:rPr lang="zh-CN" altLang="en-US" smtClean="0"/>
-              <a:t>2026/8/8</a:t>
+              <a:t>2026/8/9</a:t>
             </a:fld>
             <a:endParaRPr lang="zh-CN" altLang="en-US"/>
           </a:p>
@@ -1815,7 +1816,7 @@
           <a:p>
             <a:fld id="{D6C62C4D-D056-4B4F-8CEF-42E495CFF63F}" type="datetimeFigureOut">
               <a:rPr lang="zh-CN" altLang="en-US" smtClean="0"/>
-              <a:t>2026/8/8</a:t>
+              <a:t>2026/8/9</a:t>
             </a:fld>
             <a:endParaRPr lang="zh-CN" altLang="en-US"/>
           </a:p>
@@ -1956,7 +1957,7 @@
           <a:p>
             <a:fld id="{D6C62C4D-D056-4B4F-8CEF-42E495CFF63F}" type="datetimeFigureOut">
               <a:rPr lang="zh-CN" altLang="en-US" smtClean="0"/>
-              <a:t>2026/8/8</a:t>
+              <a:t>2026/8/9</a:t>
             </a:fld>
             <a:endParaRPr lang="zh-CN" altLang="en-US"/>
           </a:p>
@@ -2069,7 +2070,7 @@
           <a:p>
             <a:fld id="{D6C62C4D-D056-4B4F-8CEF-42E495CFF63F}" type="datetimeFigureOut">
               <a:rPr lang="zh-CN" altLang="en-US" smtClean="0"/>
-              <a:t>2026/8/8</a:t>
+              <a:t>2026/8/9</a:t>
             </a:fld>
             <a:endParaRPr lang="zh-CN" altLang="en-US"/>
           </a:p>
@@ -2380,7 +2381,7 @@
           <a:p>
             <a:fld id="{D6C62C4D-D056-4B4F-8CEF-42E495CFF63F}" type="datetimeFigureOut">
               <a:rPr lang="zh-CN" altLang="en-US" smtClean="0"/>
-              <a:t>2026/8/8</a:t>
+              <a:t>2026/8/9</a:t>
             </a:fld>
             <a:endParaRPr lang="zh-CN" altLang="en-US"/>
           </a:p>
@@ -2668,7 +2669,7 @@
           <a:p>
             <a:fld id="{D6C62C4D-D056-4B4F-8CEF-42E495CFF63F}" type="datetimeFigureOut">
               <a:rPr lang="zh-CN" altLang="en-US" smtClean="0"/>
-              <a:t>2026/8/8</a:t>
+              <a:t>2026/8/9</a:t>
             </a:fld>
             <a:endParaRPr lang="zh-CN" altLang="en-US"/>
           </a:p>
@@ -2909,7 +2910,7 @@
           <a:p>
             <a:fld id="{D6C62C4D-D056-4B4F-8CEF-42E495CFF63F}" type="datetimeFigureOut">
               <a:rPr lang="zh-CN" altLang="en-US" smtClean="0"/>
-              <a:t>2026/8/8</a:t>
+              <a:t>2026/8/9</a:t>
             </a:fld>
             <a:endParaRPr lang="zh-CN" altLang="en-US"/>
           </a:p>
@@ -3328,10 +3329,10 @@
       </p:grpSpPr>
       <p:sp>
         <p:nvSpPr>
-          <p:cNvPr id="12" name="矩形: 圆角 11">
-            <a:extLst>
-              <a:ext uri="{FF2B5EF4-FFF2-40B4-BE49-F238E27FC236}">
-                <a16:creationId xmlns:a16="http://schemas.microsoft.com/office/drawing/2014/main" id="{1AD4258D-63BF-3002-BF79-35285CE47D3B}"/>
+          <p:cNvPr id="1054" name="矩形: 圆角 1053">
+            <a:extLst>
+              <a:ext uri="{FF2B5EF4-FFF2-40B4-BE49-F238E27FC236}">
+                <a16:creationId xmlns:a16="http://schemas.microsoft.com/office/drawing/2014/main" id="{186A5A6F-85D5-3940-A36A-0D3CD0446E1F}"/>
               </a:ext>
             </a:extLst>
           </p:cNvPr>
@@ -3340,17 +3341,41 @@
         </p:nvSpPr>
         <p:spPr>
           <a:xfrm>
-            <a:off x="847135" y="2430266"/>
-            <a:ext cx="480108" cy="1987484"/>
+            <a:off x="441647" y="1173406"/>
+            <a:ext cx="11438414" cy="4802003"/>
           </a:xfrm>
           <a:prstGeom prst="roundRect">
             <a:avLst/>
           </a:prstGeom>
-          <a:solidFill>
-            <a:schemeClr val="bg1">
-              <a:lumMod val="85000"/>
-            </a:schemeClr>
-          </a:solidFill>
+          <a:gradFill flip="none" rotWithShape="1">
+            <a:gsLst>
+              <a:gs pos="0">
+                <a:schemeClr val="bg1">
+                  <a:lumMod val="85000"/>
+                </a:schemeClr>
+              </a:gs>
+              <a:gs pos="27000">
+                <a:schemeClr val="bg1">
+                  <a:lumMod val="95000"/>
+                </a:schemeClr>
+              </a:gs>
+              <a:gs pos="68000">
+                <a:schemeClr val="bg1">
+                  <a:lumMod val="95000"/>
+                </a:schemeClr>
+              </a:gs>
+              <a:gs pos="100000">
+                <a:schemeClr val="bg1"/>
+              </a:gs>
+            </a:gsLst>
+            <a:path path="circle">
+              <a:fillToRect l="50000" t="50000" r="50000" b="50000"/>
+            </a:path>
+            <a:tileRect/>
+          </a:gradFill>
+          <a:ln>
+            <a:noFill/>
+          </a:ln>
         </p:spPr>
         <p:style>
           <a:lnRef idx="2">
@@ -3377,12 +3402,650 @@
           </a:p>
         </p:txBody>
       </p:sp>
-      <p:sp>
-        <p:nvSpPr>
-          <p:cNvPr id="58" name="矩形: 圆角 57">
-            <a:extLst>
-              <a:ext uri="{FF2B5EF4-FFF2-40B4-BE49-F238E27FC236}">
-                <a16:creationId xmlns:a16="http://schemas.microsoft.com/office/drawing/2014/main" id="{D5E6F1DC-65BE-9917-E2B1-75706AC5B587}"/>
+      <p:grpSp>
+        <p:nvGrpSpPr>
+          <p:cNvPr id="38" name="组合 37">
+            <a:extLst>
+              <a:ext uri="{FF2B5EF4-FFF2-40B4-BE49-F238E27FC236}">
+                <a16:creationId xmlns:a16="http://schemas.microsoft.com/office/drawing/2014/main" id="{E0C0542B-1048-CD24-F43B-6F3C9C5B8422}"/>
+              </a:ext>
+            </a:extLst>
+          </p:cNvPr>
+          <p:cNvGrpSpPr/>
+          <p:nvPr/>
+        </p:nvGrpSpPr>
+        <p:grpSpPr>
+          <a:xfrm>
+            <a:off x="1608705" y="3596906"/>
+            <a:ext cx="6645277" cy="1838913"/>
+            <a:chOff x="1130486" y="932793"/>
+            <a:chExt cx="9850393" cy="2496207"/>
+          </a:xfrm>
+        </p:grpSpPr>
+        <p:sp>
+          <p:nvSpPr>
+            <p:cNvPr id="40" name="矩形: 圆角 39">
+              <a:extLst>
+                <a:ext uri="{FF2B5EF4-FFF2-40B4-BE49-F238E27FC236}">
+                  <a16:creationId xmlns:a16="http://schemas.microsoft.com/office/drawing/2014/main" id="{214C46A7-E5FA-37A8-80D9-5D0DA47C1D83}"/>
+                </a:ext>
+              </a:extLst>
+            </p:cNvPr>
+            <p:cNvSpPr/>
+            <p:nvPr/>
+          </p:nvSpPr>
+          <p:spPr>
+            <a:xfrm>
+              <a:off x="1161630" y="951914"/>
+              <a:ext cx="9819249" cy="2477086"/>
+            </a:xfrm>
+            <a:prstGeom prst="roundRect">
+              <a:avLst/>
+            </a:prstGeom>
+            <a:gradFill flip="none" rotWithShape="1">
+              <a:gsLst>
+                <a:gs pos="0">
+                  <a:schemeClr val="accent2">
+                    <a:lumMod val="5000"/>
+                    <a:lumOff val="95000"/>
+                  </a:schemeClr>
+                </a:gs>
+                <a:gs pos="70000">
+                  <a:schemeClr val="accent2">
+                    <a:lumMod val="45000"/>
+                    <a:lumOff val="55000"/>
+                  </a:schemeClr>
+                </a:gs>
+                <a:gs pos="86000">
+                  <a:schemeClr val="accent2">
+                    <a:lumMod val="45000"/>
+                    <a:lumOff val="55000"/>
+                  </a:schemeClr>
+                </a:gs>
+                <a:gs pos="100000">
+                  <a:schemeClr val="accent2">
+                    <a:lumMod val="60000"/>
+                    <a:lumOff val="40000"/>
+                  </a:schemeClr>
+                </a:gs>
+              </a:gsLst>
+              <a:lin ang="10800000" scaled="1"/>
+              <a:tileRect/>
+            </a:gradFill>
+            <a:ln>
+              <a:noFill/>
+            </a:ln>
+            <a:effectLst>
+              <a:outerShdw blurRad="50800" dist="50800" dir="5400000" algn="ctr" rotWithShape="0">
+                <a:srgbClr val="000000"/>
+              </a:outerShdw>
+              <a:softEdge rad="0"/>
+            </a:effectLst>
+          </p:spPr>
+          <p:style>
+            <a:lnRef idx="2">
+              <a:schemeClr val="accent1">
+                <a:shade val="15000"/>
+              </a:schemeClr>
+            </a:lnRef>
+            <a:fillRef idx="1">
+              <a:schemeClr val="accent1"/>
+            </a:fillRef>
+            <a:effectRef idx="0">
+              <a:schemeClr val="accent1"/>
+            </a:effectRef>
+            <a:fontRef idx="minor">
+              <a:schemeClr val="lt1"/>
+            </a:fontRef>
+          </p:style>
+          <p:txBody>
+            <a:bodyPr rtlCol="0" anchor="ctr"/>
+            <a:lstStyle/>
+            <a:p>
+              <a:pPr algn="ctr"/>
+              <a:endParaRPr lang="zh-CN" altLang="en-US"/>
+            </a:p>
+          </p:txBody>
+        </p:sp>
+        <p:sp>
+          <p:nvSpPr>
+            <p:cNvPr id="41" name="任意多边形: 形状 40">
+              <a:extLst>
+                <a:ext uri="{FF2B5EF4-FFF2-40B4-BE49-F238E27FC236}">
+                  <a16:creationId xmlns:a16="http://schemas.microsoft.com/office/drawing/2014/main" id="{DF1C5063-0C73-8566-B496-7237AF66D700}"/>
+                </a:ext>
+              </a:extLst>
+            </p:cNvPr>
+            <p:cNvSpPr/>
+            <p:nvPr/>
+          </p:nvSpPr>
+          <p:spPr>
+            <a:xfrm>
+              <a:off x="1130486" y="932793"/>
+              <a:ext cx="3579183" cy="445476"/>
+            </a:xfrm>
+            <a:custGeom>
+              <a:avLst/>
+              <a:gdLst>
+                <a:gd name="connsiteX0" fmla="*/ 442878 w 3579183"/>
+                <a:gd name="connsiteY0" fmla="*/ 0 h 412652"/>
+                <a:gd name="connsiteX1" fmla="*/ 3579183 w 3579183"/>
+                <a:gd name="connsiteY1" fmla="*/ 0 h 412652"/>
+                <a:gd name="connsiteX2" fmla="*/ 3476020 w 3579183"/>
+                <a:gd name="connsiteY2" fmla="*/ 412652 h 412652"/>
+                <a:gd name="connsiteX3" fmla="*/ 0 w 3579183"/>
+                <a:gd name="connsiteY3" fmla="*/ 412652 h 412652"/>
+                <a:gd name="connsiteX4" fmla="*/ 5678 w 3579183"/>
+                <a:gd name="connsiteY4" fmla="*/ 356329 h 412652"/>
+                <a:gd name="connsiteX5" fmla="*/ 442878 w 3579183"/>
+                <a:gd name="connsiteY5" fmla="*/ 0 h 412652"/>
+              </a:gdLst>
+              <a:ahLst/>
+              <a:cxnLst>
+                <a:cxn ang="0">
+                  <a:pos x="connsiteX0" y="connsiteY0"/>
+                </a:cxn>
+                <a:cxn ang="0">
+                  <a:pos x="connsiteX1" y="connsiteY1"/>
+                </a:cxn>
+                <a:cxn ang="0">
+                  <a:pos x="connsiteX2" y="connsiteY2"/>
+                </a:cxn>
+                <a:cxn ang="0">
+                  <a:pos x="connsiteX3" y="connsiteY3"/>
+                </a:cxn>
+                <a:cxn ang="0">
+                  <a:pos x="connsiteX4" y="connsiteY4"/>
+                </a:cxn>
+                <a:cxn ang="0">
+                  <a:pos x="connsiteX5" y="connsiteY5"/>
+                </a:cxn>
+              </a:cxnLst>
+              <a:rect l="l" t="t" r="r" b="b"/>
+              <a:pathLst>
+                <a:path w="3579183" h="412652">
+                  <a:moveTo>
+                    <a:pt x="442878" y="0"/>
+                  </a:moveTo>
+                  <a:lnTo>
+                    <a:pt x="3579183" y="0"/>
+                  </a:lnTo>
+                  <a:lnTo>
+                    <a:pt x="3476020" y="412652"/>
+                  </a:lnTo>
+                  <a:lnTo>
+                    <a:pt x="0" y="412652"/>
+                  </a:lnTo>
+                  <a:lnTo>
+                    <a:pt x="5678" y="356329"/>
+                  </a:lnTo>
+                  <a:cubicBezTo>
+                    <a:pt x="47291" y="152973"/>
+                    <a:pt x="227220" y="0"/>
+                    <a:pt x="442878" y="0"/>
+                  </a:cubicBezTo>
+                  <a:close/>
+                </a:path>
+              </a:pathLst>
+            </a:custGeom>
+            <a:solidFill>
+              <a:schemeClr val="accent2">
+                <a:lumMod val="75000"/>
+              </a:schemeClr>
+            </a:solidFill>
+            <a:ln>
+              <a:noFill/>
+            </a:ln>
+            <a:effectLst>
+              <a:outerShdw blurRad="50800" dist="38100" dir="2700000" algn="tl" rotWithShape="0">
+                <a:prstClr val="black">
+                  <a:alpha val="40000"/>
+                </a:prstClr>
+              </a:outerShdw>
+            </a:effectLst>
+          </p:spPr>
+          <p:style>
+            <a:lnRef idx="2">
+              <a:schemeClr val="accent1">
+                <a:shade val="15000"/>
+              </a:schemeClr>
+            </a:lnRef>
+            <a:fillRef idx="1">
+              <a:schemeClr val="accent1"/>
+            </a:fillRef>
+            <a:effectRef idx="0">
+              <a:schemeClr val="accent1"/>
+            </a:effectRef>
+            <a:fontRef idx="minor">
+              <a:schemeClr val="lt1"/>
+            </a:fontRef>
+          </p:style>
+          <p:txBody>
+            <a:bodyPr wrap="square" rtlCol="0" anchor="ctr">
+              <a:noAutofit/>
+            </a:bodyPr>
+            <a:lstStyle/>
+            <a:p>
+              <a:pPr algn="ctr"/>
+              <a:r>
+                <a:rPr lang="en-US" altLang="zh-CN" sz="1200">
+                  <a:solidFill>
+                    <a:schemeClr val="bg1"/>
+                  </a:solidFill>
+                  <a:latin typeface="Cambria" panose="02040503050406030204" pitchFamily="18" charset="0"/>
+                  <a:ea typeface="Cambria" panose="02040503050406030204" pitchFamily="18" charset="0"/>
+                </a:rPr>
+                <a:t>1</a:t>
+              </a:r>
+              <a:r>
+                <a:rPr lang="en-US" altLang="zh-CN">
+                  <a:solidFill>
+                    <a:schemeClr val="bg1"/>
+                  </a:solidFill>
+                </a:rPr>
+                <a:t> </a:t>
+              </a:r>
+              <a:r>
+                <a:rPr lang="en-US" altLang="zh-CN" sz="1200">
+                  <a:solidFill>
+                    <a:schemeClr val="bg1"/>
+                  </a:solidFill>
+                  <a:latin typeface="Cambria" panose="02040503050406030204" pitchFamily="18" charset="0"/>
+                  <a:ea typeface="Cambria" panose="02040503050406030204" pitchFamily="18" charset="0"/>
+                </a:rPr>
+                <a:t>dimensional</a:t>
+              </a:r>
+              <a:r>
+                <a:rPr lang="en-US" altLang="zh-CN">
+                  <a:solidFill>
+                    <a:schemeClr val="bg1"/>
+                  </a:solidFill>
+                </a:rPr>
+                <a:t> </a:t>
+              </a:r>
+              <a:r>
+                <a:rPr lang="en-US" altLang="zh-CN" sz="1200">
+                  <a:solidFill>
+                    <a:schemeClr val="bg1"/>
+                  </a:solidFill>
+                  <a:latin typeface="Cambria" panose="02040503050406030204" pitchFamily="18" charset="0"/>
+                  <a:ea typeface="Cambria" panose="02040503050406030204" pitchFamily="18" charset="0"/>
+                </a:rPr>
+                <a:t>substructure</a:t>
+              </a:r>
+              <a:endParaRPr lang="zh-CN" altLang="en-US" sz="1200">
+                <a:solidFill>
+                  <a:schemeClr val="bg1"/>
+                </a:solidFill>
+                <a:latin typeface="Cambria" panose="02040503050406030204" pitchFamily="18" charset="0"/>
+              </a:endParaRPr>
+            </a:p>
+          </p:txBody>
+        </p:sp>
+      </p:grpSp>
+      <p:grpSp>
+        <p:nvGrpSpPr>
+          <p:cNvPr id="7" name="组合 6">
+            <a:extLst>
+              <a:ext uri="{FF2B5EF4-FFF2-40B4-BE49-F238E27FC236}">
+                <a16:creationId xmlns:a16="http://schemas.microsoft.com/office/drawing/2014/main" id="{B4D77AA7-7D21-04FD-56E2-B1F433DB4BDD}"/>
+              </a:ext>
+            </a:extLst>
+          </p:cNvPr>
+          <p:cNvGrpSpPr/>
+          <p:nvPr/>
+        </p:nvGrpSpPr>
+        <p:grpSpPr>
+          <a:xfrm>
+            <a:off x="1596774" y="1570346"/>
+            <a:ext cx="6657208" cy="1852201"/>
+            <a:chOff x="1161630" y="951914"/>
+            <a:chExt cx="9868740" cy="2494985"/>
+          </a:xfrm>
+        </p:grpSpPr>
+        <p:sp>
+          <p:nvSpPr>
+            <p:cNvPr id="2" name="矩形: 圆角 1">
+              <a:extLst>
+                <a:ext uri="{FF2B5EF4-FFF2-40B4-BE49-F238E27FC236}">
+                  <a16:creationId xmlns:a16="http://schemas.microsoft.com/office/drawing/2014/main" id="{7CE87EF3-1D61-83B5-92FC-F2378FE71E4A}"/>
+                </a:ext>
+              </a:extLst>
+            </p:cNvPr>
+            <p:cNvSpPr/>
+            <p:nvPr/>
+          </p:nvSpPr>
+          <p:spPr>
+            <a:xfrm>
+              <a:off x="1211121" y="969813"/>
+              <a:ext cx="9819249" cy="2477086"/>
+            </a:xfrm>
+            <a:prstGeom prst="roundRect">
+              <a:avLst/>
+            </a:prstGeom>
+            <a:gradFill flip="none" rotWithShape="1">
+              <a:gsLst>
+                <a:gs pos="2000">
+                  <a:srgbClr val="E8F8FE">
+                    <a:alpha val="99000"/>
+                  </a:srgbClr>
+                </a:gs>
+                <a:gs pos="17088">
+                  <a:srgbClr val="DAF3FD"/>
+                </a:gs>
+                <a:gs pos="34175">
+                  <a:srgbClr val="C1EBFB"/>
+                </a:gs>
+                <a:gs pos="42772">
+                  <a:srgbClr val="B5E7FA"/>
+                </a:gs>
+                <a:gs pos="3631">
+                  <a:srgbClr val="EDFAFE"/>
+                </a:gs>
+                <a:gs pos="0">
+                  <a:schemeClr val="accent4">
+                    <a:lumMod val="5000"/>
+                    <a:lumOff val="95000"/>
+                  </a:schemeClr>
+                </a:gs>
+                <a:gs pos="63664">
+                  <a:srgbClr val="97DDF8"/>
+                </a:gs>
+                <a:gs pos="74000">
+                  <a:schemeClr val="accent4">
+                    <a:lumMod val="45000"/>
+                    <a:lumOff val="55000"/>
+                  </a:schemeClr>
+                </a:gs>
+                <a:gs pos="83000">
+                  <a:schemeClr val="accent4">
+                    <a:lumMod val="45000"/>
+                    <a:lumOff val="55000"/>
+                  </a:schemeClr>
+                </a:gs>
+                <a:gs pos="100000">
+                  <a:schemeClr val="accent4">
+                    <a:lumMod val="30000"/>
+                    <a:lumOff val="70000"/>
+                  </a:schemeClr>
+                </a:gs>
+              </a:gsLst>
+              <a:lin ang="10800000" scaled="0"/>
+              <a:tileRect/>
+            </a:gradFill>
+            <a:ln>
+              <a:gradFill>
+                <a:gsLst>
+                  <a:gs pos="0">
+                    <a:schemeClr val="bg2">
+                      <a:lumMod val="90000"/>
+                    </a:schemeClr>
+                  </a:gs>
+                  <a:gs pos="74000">
+                    <a:schemeClr val="accent1">
+                      <a:lumMod val="45000"/>
+                      <a:lumOff val="55000"/>
+                    </a:schemeClr>
+                  </a:gs>
+                  <a:gs pos="83000">
+                    <a:schemeClr val="accent1">
+                      <a:lumMod val="45000"/>
+                      <a:lumOff val="55000"/>
+                    </a:schemeClr>
+                  </a:gs>
+                  <a:gs pos="100000">
+                    <a:schemeClr val="accent1">
+                      <a:lumMod val="30000"/>
+                      <a:lumOff val="70000"/>
+                    </a:schemeClr>
+                  </a:gs>
+                </a:gsLst>
+                <a:lin ang="5400000" scaled="1"/>
+              </a:gradFill>
+            </a:ln>
+            <a:effectLst>
+              <a:outerShdw blurRad="50800" dist="50800" dir="5400000" algn="ctr" rotWithShape="0">
+                <a:srgbClr val="000000"/>
+              </a:outerShdw>
+              <a:softEdge rad="0"/>
+            </a:effectLst>
+          </p:spPr>
+          <p:style>
+            <a:lnRef idx="2">
+              <a:schemeClr val="accent1">
+                <a:shade val="15000"/>
+              </a:schemeClr>
+            </a:lnRef>
+            <a:fillRef idx="1">
+              <a:schemeClr val="accent1"/>
+            </a:fillRef>
+            <a:effectRef idx="0">
+              <a:schemeClr val="accent1"/>
+            </a:effectRef>
+            <a:fontRef idx="minor">
+              <a:schemeClr val="lt1"/>
+            </a:fontRef>
+          </p:style>
+          <p:txBody>
+            <a:bodyPr rtlCol="0" anchor="ctr"/>
+            <a:lstStyle/>
+            <a:p>
+              <a:pPr algn="ctr"/>
+              <a:endParaRPr lang="zh-CN" altLang="en-US"/>
+            </a:p>
+          </p:txBody>
+        </p:sp>
+        <p:sp>
+          <p:nvSpPr>
+            <p:cNvPr id="3" name="任意多边形: 形状 2">
+              <a:extLst>
+                <a:ext uri="{FF2B5EF4-FFF2-40B4-BE49-F238E27FC236}">
+                  <a16:creationId xmlns:a16="http://schemas.microsoft.com/office/drawing/2014/main" id="{D2229006-0BAA-E200-9F85-3031B359CF55}"/>
+                </a:ext>
+              </a:extLst>
+            </p:cNvPr>
+            <p:cNvSpPr/>
+            <p:nvPr/>
+          </p:nvSpPr>
+          <p:spPr>
+            <a:xfrm>
+              <a:off x="1161630" y="951914"/>
+              <a:ext cx="3579183" cy="445477"/>
+            </a:xfrm>
+            <a:custGeom>
+              <a:avLst/>
+              <a:gdLst>
+                <a:gd name="connsiteX0" fmla="*/ 442878 w 3579183"/>
+                <a:gd name="connsiteY0" fmla="*/ 0 h 412652"/>
+                <a:gd name="connsiteX1" fmla="*/ 3579183 w 3579183"/>
+                <a:gd name="connsiteY1" fmla="*/ 0 h 412652"/>
+                <a:gd name="connsiteX2" fmla="*/ 3476020 w 3579183"/>
+                <a:gd name="connsiteY2" fmla="*/ 412652 h 412652"/>
+                <a:gd name="connsiteX3" fmla="*/ 0 w 3579183"/>
+                <a:gd name="connsiteY3" fmla="*/ 412652 h 412652"/>
+                <a:gd name="connsiteX4" fmla="*/ 5678 w 3579183"/>
+                <a:gd name="connsiteY4" fmla="*/ 356329 h 412652"/>
+                <a:gd name="connsiteX5" fmla="*/ 442878 w 3579183"/>
+                <a:gd name="connsiteY5" fmla="*/ 0 h 412652"/>
+              </a:gdLst>
+              <a:ahLst/>
+              <a:cxnLst>
+                <a:cxn ang="0">
+                  <a:pos x="connsiteX0" y="connsiteY0"/>
+                </a:cxn>
+                <a:cxn ang="0">
+                  <a:pos x="connsiteX1" y="connsiteY1"/>
+                </a:cxn>
+                <a:cxn ang="0">
+                  <a:pos x="connsiteX2" y="connsiteY2"/>
+                </a:cxn>
+                <a:cxn ang="0">
+                  <a:pos x="connsiteX3" y="connsiteY3"/>
+                </a:cxn>
+                <a:cxn ang="0">
+                  <a:pos x="connsiteX4" y="connsiteY4"/>
+                </a:cxn>
+                <a:cxn ang="0">
+                  <a:pos x="connsiteX5" y="connsiteY5"/>
+                </a:cxn>
+              </a:cxnLst>
+              <a:rect l="l" t="t" r="r" b="b"/>
+              <a:pathLst>
+                <a:path w="3579183" h="412652">
+                  <a:moveTo>
+                    <a:pt x="442878" y="0"/>
+                  </a:moveTo>
+                  <a:lnTo>
+                    <a:pt x="3579183" y="0"/>
+                  </a:lnTo>
+                  <a:lnTo>
+                    <a:pt x="3476020" y="412652"/>
+                  </a:lnTo>
+                  <a:lnTo>
+                    <a:pt x="0" y="412652"/>
+                  </a:lnTo>
+                  <a:lnTo>
+                    <a:pt x="5678" y="356329"/>
+                  </a:lnTo>
+                  <a:cubicBezTo>
+                    <a:pt x="47291" y="152973"/>
+                    <a:pt x="227220" y="0"/>
+                    <a:pt x="442878" y="0"/>
+                  </a:cubicBezTo>
+                  <a:close/>
+                </a:path>
+              </a:pathLst>
+            </a:custGeom>
+            <a:solidFill>
+              <a:schemeClr val="tx2">
+                <a:lumMod val="10000"/>
+                <a:lumOff val="90000"/>
+              </a:schemeClr>
+            </a:solidFill>
+            <a:ln>
+              <a:noFill/>
+            </a:ln>
+            <a:effectLst>
+              <a:outerShdw blurRad="50800" dist="38100" dir="2700000" algn="tl" rotWithShape="0">
+                <a:prstClr val="black">
+                  <a:alpha val="40000"/>
+                </a:prstClr>
+              </a:outerShdw>
+            </a:effectLst>
+          </p:spPr>
+          <p:style>
+            <a:lnRef idx="2">
+              <a:schemeClr val="accent1">
+                <a:shade val="15000"/>
+              </a:schemeClr>
+            </a:lnRef>
+            <a:fillRef idx="1">
+              <a:schemeClr val="accent1"/>
+            </a:fillRef>
+            <a:effectRef idx="0">
+              <a:schemeClr val="accent1"/>
+            </a:effectRef>
+            <a:fontRef idx="minor">
+              <a:schemeClr val="lt1"/>
+            </a:fontRef>
+          </p:style>
+          <p:txBody>
+            <a:bodyPr wrap="square" rtlCol="0" anchor="ctr">
+              <a:noAutofit/>
+            </a:bodyPr>
+            <a:lstStyle/>
+            <a:p>
+              <a:pPr algn="ctr"/>
+              <a:r>
+                <a:rPr lang="en-US" altLang="zh-CN" sz="1200">
+                  <a:solidFill>
+                    <a:schemeClr val="tx1"/>
+                  </a:solidFill>
+                  <a:latin typeface="Cambria" panose="02040503050406030204" pitchFamily="18" charset="0"/>
+                  <a:ea typeface="Cambria" panose="02040503050406030204" pitchFamily="18" charset="0"/>
+                </a:rPr>
+                <a:t>3</a:t>
+              </a:r>
+              <a:r>
+                <a:rPr lang="en-US" altLang="zh-CN"/>
+                <a:t> </a:t>
+              </a:r>
+              <a:r>
+                <a:rPr lang="en-US" altLang="zh-CN" sz="1200">
+                  <a:solidFill>
+                    <a:schemeClr val="tx1"/>
+                  </a:solidFill>
+                  <a:latin typeface="Cambria" panose="02040503050406030204" pitchFamily="18" charset="0"/>
+                  <a:ea typeface="Cambria" panose="02040503050406030204" pitchFamily="18" charset="0"/>
+                </a:rPr>
+                <a:t>dimensional</a:t>
+              </a:r>
+              <a:r>
+                <a:rPr lang="en-US" altLang="zh-CN"/>
+                <a:t> </a:t>
+              </a:r>
+              <a:r>
+                <a:rPr lang="en-US" altLang="zh-CN" sz="1200">
+                  <a:solidFill>
+                    <a:schemeClr val="tx1"/>
+                  </a:solidFill>
+                  <a:latin typeface="Cambria" panose="02040503050406030204" pitchFamily="18" charset="0"/>
+                  <a:ea typeface="Cambria" panose="02040503050406030204" pitchFamily="18" charset="0"/>
+                </a:rPr>
+                <a:t>substructure</a:t>
+              </a:r>
+              <a:endParaRPr lang="zh-CN" altLang="en-US" sz="1200">
+                <a:solidFill>
+                  <a:schemeClr val="tx1"/>
+                </a:solidFill>
+                <a:latin typeface="Cambria" panose="02040503050406030204" pitchFamily="18" charset="0"/>
+              </a:endParaRPr>
+            </a:p>
+          </p:txBody>
+        </p:sp>
+      </p:grpSp>
+      <p:pic>
+        <p:nvPicPr>
+          <p:cNvPr id="18" name="图片 17">
+            <a:extLst>
+              <a:ext uri="{FF2B5EF4-FFF2-40B4-BE49-F238E27FC236}">
+                <a16:creationId xmlns:a16="http://schemas.microsoft.com/office/drawing/2014/main" id="{4150ABE2-3CEA-EADD-127E-1550D256B20D}"/>
+              </a:ext>
+            </a:extLst>
+          </p:cNvPr>
+          <p:cNvPicPr>
+            <a:picLocks noChangeAspect="1"/>
+          </p:cNvPicPr>
+          <p:nvPr/>
+        </p:nvPicPr>
+        <p:blipFill>
+          <a:blip r:embed="rId2">
+            <a:extLst>
+              <a:ext uri="{28A0092B-C50C-407E-A947-70E740481C1C}">
+                <a14:useLocalDpi xmlns:a14="http://schemas.microsoft.com/office/drawing/2010/main" val="0"/>
+              </a:ext>
+            </a:extLst>
+          </a:blip>
+          <a:stretch>
+            <a:fillRect/>
+          </a:stretch>
+        </p:blipFill>
+        <p:spPr>
+          <a:xfrm>
+            <a:off x="3197825" y="1782266"/>
+            <a:ext cx="2462614" cy="1641742"/>
+          </a:xfrm>
+          <a:prstGeom prst="rect">
+            <a:avLst/>
+          </a:prstGeom>
+        </p:spPr>
+      </p:pic>
+      <p:sp>
+        <p:nvSpPr>
+          <p:cNvPr id="12" name="矩形: 圆角 11">
+            <a:extLst>
+              <a:ext uri="{FF2B5EF4-FFF2-40B4-BE49-F238E27FC236}">
+                <a16:creationId xmlns:a16="http://schemas.microsoft.com/office/drawing/2014/main" id="{1AD4258D-63BF-3002-BF79-35285CE47D3B}"/>
               </a:ext>
             </a:extLst>
           </p:cNvPr>
@@ -3391,18 +4054,20 @@
         </p:nvSpPr>
         <p:spPr>
           <a:xfrm>
-            <a:off x="5828124" y="1616422"/>
-            <a:ext cx="1295187" cy="1577749"/>
+            <a:off x="847135" y="2430266"/>
+            <a:ext cx="480108" cy="1987484"/>
           </a:xfrm>
           <a:prstGeom prst="roundRect">
             <a:avLst/>
           </a:prstGeom>
           <a:solidFill>
-            <a:schemeClr val="tx2">
-              <a:lumMod val="10000"/>
-              <a:lumOff val="90000"/>
+            <a:schemeClr val="bg1">
+              <a:lumMod val="85000"/>
             </a:schemeClr>
           </a:solidFill>
+          <a:ln>
+            <a:noFill/>
+          </a:ln>
           <a:effectLst>
             <a:outerShdw blurRad="50800" dist="38100" dir="2700000" algn="tl" rotWithShape="0">
               <a:prstClr val="black">
@@ -3432,6 +4097,66 @@
           <a:lstStyle/>
           <a:p>
             <a:pPr algn="ctr"/>
+            <a:endParaRPr lang="zh-CN" altLang="en-US"/>
+          </a:p>
+        </p:txBody>
+      </p:sp>
+      <p:sp>
+        <p:nvSpPr>
+          <p:cNvPr id="58" name="矩形: 圆角 57">
+            <a:extLst>
+              <a:ext uri="{FF2B5EF4-FFF2-40B4-BE49-F238E27FC236}">
+                <a16:creationId xmlns:a16="http://schemas.microsoft.com/office/drawing/2014/main" id="{D5E6F1DC-65BE-9917-E2B1-75706AC5B587}"/>
+              </a:ext>
+            </a:extLst>
+          </p:cNvPr>
+          <p:cNvSpPr/>
+          <p:nvPr/>
+        </p:nvSpPr>
+        <p:spPr>
+          <a:xfrm>
+            <a:off x="5896681" y="1667580"/>
+            <a:ext cx="1295187" cy="1577749"/>
+          </a:xfrm>
+          <a:prstGeom prst="roundRect">
+            <a:avLst/>
+          </a:prstGeom>
+          <a:solidFill>
+            <a:schemeClr val="tx2">
+              <a:lumMod val="10000"/>
+              <a:lumOff val="90000"/>
+            </a:schemeClr>
+          </a:solidFill>
+          <a:effectLst>
+            <a:outerShdw blurRad="50800" dist="38100" dir="2700000" algn="tl" rotWithShape="0">
+              <a:prstClr val="black">
+                <a:alpha val="40000"/>
+              </a:prstClr>
+            </a:outerShdw>
+            <a:softEdge rad="25400"/>
+          </a:effectLst>
+        </p:spPr>
+        <p:style>
+          <a:lnRef idx="2">
+            <a:schemeClr val="accent1">
+              <a:shade val="15000"/>
+            </a:schemeClr>
+          </a:lnRef>
+          <a:fillRef idx="1">
+            <a:schemeClr val="accent1"/>
+          </a:fillRef>
+          <a:effectRef idx="0">
+            <a:schemeClr val="accent1"/>
+          </a:effectRef>
+          <a:fontRef idx="minor">
+            <a:schemeClr val="lt1"/>
+          </a:fontRef>
+        </p:style>
+        <p:txBody>
+          <a:bodyPr rtlCol="0" anchor="ctr"/>
+          <a:lstStyle/>
+          <a:p>
+            <a:pPr algn="ctr"/>
             <a:r>
               <a:rPr lang="en-US" altLang="zh-CN" sz="1200" dirty="0" err="1">
                 <a:solidFill>
@@ -3458,112 +4183,6 @@
               </a:solidFill>
               <a:latin typeface="Cambria" panose="02040503050406030204" pitchFamily="18" charset="0"/>
             </a:endParaRPr>
-          </a:p>
-        </p:txBody>
-      </p:sp>
-      <p:pic>
-        <p:nvPicPr>
-          <p:cNvPr id="1032" name="Picture 8" descr="Neuropeptide Art - Fine Art America">
-            <a:extLst>
-              <a:ext uri="{FF2B5EF4-FFF2-40B4-BE49-F238E27FC236}">
-                <a16:creationId xmlns:a16="http://schemas.microsoft.com/office/drawing/2014/main" id="{51E64DCF-7CFC-2027-4BE6-39A821AEEFDE}"/>
-              </a:ext>
-            </a:extLst>
-          </p:cNvPr>
-          <p:cNvPicPr>
-            <a:picLocks noChangeAspect="1" noChangeArrowheads="1"/>
-          </p:cNvPicPr>
-          <p:nvPr/>
-        </p:nvPicPr>
-        <p:blipFill>
-          <a:blip r:embed="rId2">
-            <a:extLst>
-              <a:ext uri="{28A0092B-C50C-407E-A947-70E740481C1C}">
-                <a14:useLocalDpi xmlns:a14="http://schemas.microsoft.com/office/drawing/2010/main" val="0"/>
-              </a:ext>
-            </a:extLst>
-          </a:blip>
-          <a:srcRect/>
-          <a:stretch>
-            <a:fillRect/>
-          </a:stretch>
-        </p:blipFill>
-        <p:spPr bwMode="auto">
-          <a:xfrm>
-            <a:off x="3193803" y="2003627"/>
-            <a:ext cx="2180692" cy="1677455"/>
-          </a:xfrm>
-          <a:prstGeom prst="rect">
-            <a:avLst/>
-          </a:prstGeom>
-          <a:noFill/>
-          <a:extLst>
-            <a:ext uri="{909E8E84-426E-40DD-AFC4-6F175D3DCCD1}">
-              <a14:hiddenFill xmlns:a14="http://schemas.microsoft.com/office/drawing/2010/main">
-                <a:solidFill>
-                  <a:srgbClr val="FFFFFF"/>
-                </a:solidFill>
-              </a14:hiddenFill>
-            </a:ext>
-          </a:extLst>
-        </p:spPr>
-      </p:pic>
-      <p:sp>
-        <p:nvSpPr>
-          <p:cNvPr id="25" name="矩形: 圆角 24">
-            <a:extLst>
-              <a:ext uri="{FF2B5EF4-FFF2-40B4-BE49-F238E27FC236}">
-                <a16:creationId xmlns:a16="http://schemas.microsoft.com/office/drawing/2014/main" id="{590F7AF5-ADBB-F662-A2D0-7A5420272928}"/>
-              </a:ext>
-            </a:extLst>
-          </p:cNvPr>
-          <p:cNvSpPr/>
-          <p:nvPr/>
-        </p:nvSpPr>
-        <p:spPr>
-          <a:xfrm>
-            <a:off x="2179988" y="1963542"/>
-            <a:ext cx="1093470" cy="734251"/>
-          </a:xfrm>
-          <a:prstGeom prst="roundRect">
-            <a:avLst/>
-          </a:prstGeom>
-          <a:solidFill>
-            <a:schemeClr val="accent4">
-              <a:lumMod val="20000"/>
-              <a:lumOff val="80000"/>
-            </a:schemeClr>
-          </a:solidFill>
-          <a:effectLst>
-            <a:outerShdw blurRad="50800" dist="38100" dir="2700000" algn="tl" rotWithShape="0">
-              <a:prstClr val="black">
-                <a:alpha val="40000"/>
-              </a:prstClr>
-            </a:outerShdw>
-          </a:effectLst>
-        </p:spPr>
-        <p:style>
-          <a:lnRef idx="2">
-            <a:schemeClr val="accent4">
-              <a:shade val="15000"/>
-            </a:schemeClr>
-          </a:lnRef>
-          <a:fillRef idx="1">
-            <a:schemeClr val="accent4"/>
-          </a:fillRef>
-          <a:effectRef idx="0">
-            <a:schemeClr val="accent4"/>
-          </a:effectRef>
-          <a:fontRef idx="minor">
-            <a:schemeClr val="lt1"/>
-          </a:fontRef>
-        </p:style>
-        <p:txBody>
-          <a:bodyPr rtlCol="0" anchor="ctr"/>
-          <a:lstStyle/>
-          <a:p>
-            <a:pPr algn="ctr"/>
-            <a:endParaRPr lang="zh-CN" altLang="en-US"/>
           </a:p>
         </p:txBody>
       </p:sp>
@@ -4061,7 +4680,7 @@
         </p:nvCxnSpPr>
         <p:spPr>
           <a:xfrm>
-            <a:off x="1402868" y="2610218"/>
+            <a:off x="1360561" y="2615374"/>
             <a:ext cx="583330" cy="0"/>
           </a:xfrm>
           <a:prstGeom prst="straightConnector1">
@@ -4103,8 +4722,8 @@
         </p:nvCxnSpPr>
         <p:spPr>
           <a:xfrm>
-            <a:off x="1426925" y="4305493"/>
-            <a:ext cx="389540" cy="302"/>
+            <a:off x="1439144" y="4417448"/>
+            <a:ext cx="439381" cy="302"/>
           </a:xfrm>
           <a:prstGeom prst="straightConnector1">
             <a:avLst/>
@@ -4128,288 +4747,341 @@
           </a:fontRef>
         </p:style>
       </p:cxnSp>
-      <p:sp>
-        <p:nvSpPr>
-          <p:cNvPr id="23" name="矩形: 圆角 22">
-            <a:extLst>
-              <a:ext uri="{FF2B5EF4-FFF2-40B4-BE49-F238E27FC236}">
-                <a16:creationId xmlns:a16="http://schemas.microsoft.com/office/drawing/2014/main" id="{DDD4979E-C4AD-0E0B-C520-F65D28975DBA}"/>
-              </a:ext>
-            </a:extLst>
-          </p:cNvPr>
-          <p:cNvSpPr/>
+      <p:grpSp>
+        <p:nvGrpSpPr>
+          <p:cNvPr id="26" name="组合 25">
+            <a:extLst>
+              <a:ext uri="{FF2B5EF4-FFF2-40B4-BE49-F238E27FC236}">
+                <a16:creationId xmlns:a16="http://schemas.microsoft.com/office/drawing/2014/main" id="{6736074D-DEE4-F85A-7BC8-D7AD8D2E31B2}"/>
+              </a:ext>
+            </a:extLst>
+          </p:cNvPr>
+          <p:cNvGrpSpPr/>
           <p:nvPr/>
-        </p:nvSpPr>
-        <p:spPr>
+        </p:nvGrpSpPr>
+        <p:grpSpPr>
           <a:xfrm>
-            <a:off x="2076992" y="2099218"/>
-            <a:ext cx="1093470" cy="734251"/>
+            <a:off x="1959074" y="2005581"/>
+            <a:ext cx="1231792" cy="991322"/>
+            <a:chOff x="1959074" y="2005581"/>
+            <a:chExt cx="1231792" cy="991322"/>
           </a:xfrm>
-          <a:prstGeom prst="roundRect">
-            <a:avLst/>
-          </a:prstGeom>
-          <a:solidFill>
-            <a:schemeClr val="accent4">
-              <a:lumMod val="20000"/>
-              <a:lumOff val="80000"/>
-            </a:schemeClr>
-          </a:solidFill>
-          <a:effectLst>
-            <a:outerShdw blurRad="50800" dist="38100" dir="2700000" algn="tl" rotWithShape="0">
-              <a:prstClr val="black">
-                <a:alpha val="40000"/>
-              </a:prstClr>
-            </a:outerShdw>
-          </a:effectLst>
-        </p:spPr>
-        <p:style>
-          <a:lnRef idx="2">
-            <a:schemeClr val="accent4">
-              <a:shade val="15000"/>
-            </a:schemeClr>
-          </a:lnRef>
-          <a:fillRef idx="1">
-            <a:schemeClr val="accent4"/>
-          </a:fillRef>
-          <a:effectRef idx="0">
-            <a:schemeClr val="accent4"/>
-          </a:effectRef>
-          <a:fontRef idx="minor">
-            <a:schemeClr val="lt1"/>
-          </a:fontRef>
-        </p:style>
-        <p:txBody>
-          <a:bodyPr rtlCol="0" anchor="ctr"/>
-          <a:lstStyle/>
-          <a:p>
-            <a:pPr algn="ctr"/>
-            <a:endParaRPr lang="zh-CN" altLang="en-US"/>
-          </a:p>
-        </p:txBody>
-      </p:sp>
-      <p:sp>
-        <p:nvSpPr>
-          <p:cNvPr id="24" name="矩形: 圆角 23">
-            <a:extLst>
-              <a:ext uri="{FF2B5EF4-FFF2-40B4-BE49-F238E27FC236}">
-                <a16:creationId xmlns:a16="http://schemas.microsoft.com/office/drawing/2014/main" id="{4F0F1A37-EFF8-52F1-01E0-5DDC6AF1FE45}"/>
-              </a:ext>
-            </a:extLst>
-          </p:cNvPr>
-          <p:cNvSpPr/>
-          <p:nvPr/>
-        </p:nvSpPr>
-        <p:spPr>
-          <a:xfrm>
-            <a:off x="2004798" y="2264413"/>
-            <a:ext cx="1093470" cy="734251"/>
-          </a:xfrm>
-          <a:prstGeom prst="roundRect">
-            <a:avLst/>
-          </a:prstGeom>
-          <a:solidFill>
-            <a:schemeClr val="accent4">
-              <a:lumMod val="20000"/>
-              <a:lumOff val="80000"/>
-            </a:schemeClr>
-          </a:solidFill>
-          <a:effectLst>
-            <a:outerShdw blurRad="50800" dist="38100" dir="2700000" algn="tl" rotWithShape="0">
-              <a:prstClr val="black">
-                <a:alpha val="40000"/>
-              </a:prstClr>
-            </a:outerShdw>
-          </a:effectLst>
-        </p:spPr>
-        <p:style>
-          <a:lnRef idx="2">
-            <a:schemeClr val="accent4">
-              <a:shade val="15000"/>
-            </a:schemeClr>
-          </a:lnRef>
-          <a:fillRef idx="1">
-            <a:schemeClr val="accent4"/>
-          </a:fillRef>
-          <a:effectRef idx="0">
-            <a:schemeClr val="accent4"/>
-          </a:effectRef>
-          <a:fontRef idx="minor">
-            <a:schemeClr val="lt1"/>
-          </a:fontRef>
-        </p:style>
-        <p:txBody>
-          <a:bodyPr rtlCol="0" anchor="ctr"/>
-          <a:lstStyle/>
-          <a:p>
-            <a:pPr algn="ctr"/>
-            <a:r>
-              <a:rPr lang="en-US" altLang="zh-CN" sz="1600" dirty="0">
+        </p:grpSpPr>
+        <p:sp>
+          <p:nvSpPr>
+            <p:cNvPr id="25" name="矩形: 圆角 24">
+              <a:extLst>
+                <a:ext uri="{FF2B5EF4-FFF2-40B4-BE49-F238E27FC236}">
+                  <a16:creationId xmlns:a16="http://schemas.microsoft.com/office/drawing/2014/main" id="{590F7AF5-ADBB-F662-A2D0-7A5420272928}"/>
+                </a:ext>
+              </a:extLst>
+            </p:cNvPr>
+            <p:cNvSpPr/>
+            <p:nvPr/>
+          </p:nvSpPr>
+          <p:spPr>
+            <a:xfrm>
+              <a:off x="2097396" y="2005581"/>
+              <a:ext cx="1093470" cy="734251"/>
+            </a:xfrm>
+            <a:prstGeom prst="roundRect">
+              <a:avLst/>
+            </a:prstGeom>
+            <a:solidFill>
+              <a:schemeClr val="accent4">
+                <a:lumMod val="20000"/>
+                <a:lumOff val="80000"/>
+              </a:schemeClr>
+            </a:solidFill>
+            <a:ln>
+              <a:gradFill>
+                <a:gsLst>
+                  <a:gs pos="0">
+                    <a:schemeClr val="accent1">
+                      <a:lumMod val="5000"/>
+                      <a:lumOff val="95000"/>
+                    </a:schemeClr>
+                  </a:gs>
+                  <a:gs pos="74000">
+                    <a:schemeClr val="accent1">
+                      <a:lumMod val="45000"/>
+                      <a:lumOff val="55000"/>
+                    </a:schemeClr>
+                  </a:gs>
+                  <a:gs pos="83000">
+                    <a:schemeClr val="accent1">
+                      <a:lumMod val="45000"/>
+                      <a:lumOff val="55000"/>
+                    </a:schemeClr>
+                  </a:gs>
+                  <a:gs pos="100000">
+                    <a:schemeClr val="accent1">
+                      <a:lumMod val="30000"/>
+                      <a:lumOff val="70000"/>
+                    </a:schemeClr>
+                  </a:gs>
+                </a:gsLst>
+                <a:lin ang="5400000" scaled="1"/>
+              </a:gradFill>
+            </a:ln>
+            <a:effectLst>
+              <a:outerShdw blurRad="50800" dist="38100" dir="2700000" algn="tl" rotWithShape="0">
+                <a:prstClr val="black">
+                  <a:alpha val="40000"/>
+                </a:prstClr>
+              </a:outerShdw>
+            </a:effectLst>
+          </p:spPr>
+          <p:style>
+            <a:lnRef idx="2">
+              <a:schemeClr val="accent4">
+                <a:shade val="15000"/>
+              </a:schemeClr>
+            </a:lnRef>
+            <a:fillRef idx="1">
+              <a:schemeClr val="accent4"/>
+            </a:fillRef>
+            <a:effectRef idx="0">
+              <a:schemeClr val="accent4"/>
+            </a:effectRef>
+            <a:fontRef idx="minor">
+              <a:schemeClr val="lt1"/>
+            </a:fontRef>
+          </p:style>
+          <p:txBody>
+            <a:bodyPr rtlCol="0" anchor="ctr"/>
+            <a:lstStyle/>
+            <a:p>
+              <a:pPr algn="ctr"/>
+              <a:endParaRPr lang="zh-CN" altLang="en-US"/>
+            </a:p>
+          </p:txBody>
+        </p:sp>
+        <p:sp>
+          <p:nvSpPr>
+            <p:cNvPr id="23" name="矩形: 圆角 22">
+              <a:extLst>
+                <a:ext uri="{FF2B5EF4-FFF2-40B4-BE49-F238E27FC236}">
+                  <a16:creationId xmlns:a16="http://schemas.microsoft.com/office/drawing/2014/main" id="{DDD4979E-C4AD-0E0B-C520-F65D28975DBA}"/>
+                </a:ext>
+              </a:extLst>
+            </p:cNvPr>
+            <p:cNvSpPr/>
+            <p:nvPr/>
+          </p:nvSpPr>
+          <p:spPr>
+            <a:xfrm>
+              <a:off x="2016481" y="2117377"/>
+              <a:ext cx="1093470" cy="734251"/>
+            </a:xfrm>
+            <a:prstGeom prst="roundRect">
+              <a:avLst/>
+            </a:prstGeom>
+            <a:solidFill>
+              <a:schemeClr val="accent4">
+                <a:lumMod val="20000"/>
+                <a:lumOff val="80000"/>
+              </a:schemeClr>
+            </a:solidFill>
+            <a:ln>
+              <a:gradFill>
+                <a:gsLst>
+                  <a:gs pos="0">
+                    <a:schemeClr val="accent1">
+                      <a:lumMod val="5000"/>
+                      <a:lumOff val="95000"/>
+                    </a:schemeClr>
+                  </a:gs>
+                  <a:gs pos="74000">
+                    <a:schemeClr val="accent1">
+                      <a:lumMod val="45000"/>
+                      <a:lumOff val="55000"/>
+                    </a:schemeClr>
+                  </a:gs>
+                  <a:gs pos="83000">
+                    <a:schemeClr val="accent1">
+                      <a:lumMod val="45000"/>
+                      <a:lumOff val="55000"/>
+                    </a:schemeClr>
+                  </a:gs>
+                  <a:gs pos="100000">
+                    <a:schemeClr val="accent1">
+                      <a:lumMod val="30000"/>
+                      <a:lumOff val="70000"/>
+                    </a:schemeClr>
+                  </a:gs>
+                </a:gsLst>
+                <a:lin ang="5400000" scaled="1"/>
+              </a:gradFill>
+            </a:ln>
+            <a:effectLst>
+              <a:outerShdw blurRad="50800" dist="38100" dir="2700000" algn="tl" rotWithShape="0">
+                <a:prstClr val="black">
+                  <a:alpha val="40000"/>
+                </a:prstClr>
+              </a:outerShdw>
+            </a:effectLst>
+          </p:spPr>
+          <p:style>
+            <a:lnRef idx="2">
+              <a:schemeClr val="accent4">
+                <a:shade val="15000"/>
+              </a:schemeClr>
+            </a:lnRef>
+            <a:fillRef idx="1">
+              <a:schemeClr val="accent4"/>
+            </a:fillRef>
+            <a:effectRef idx="0">
+              <a:schemeClr val="accent4"/>
+            </a:effectRef>
+            <a:fontRef idx="minor">
+              <a:schemeClr val="lt1"/>
+            </a:fontRef>
+          </p:style>
+          <p:txBody>
+            <a:bodyPr rtlCol="0" anchor="ctr"/>
+            <a:lstStyle/>
+            <a:p>
+              <a:pPr algn="ctr"/>
+              <a:endParaRPr lang="zh-CN" altLang="en-US"/>
+            </a:p>
+          </p:txBody>
+        </p:sp>
+        <p:sp>
+          <p:nvSpPr>
+            <p:cNvPr id="24" name="矩形: 圆角 23">
+              <a:extLst>
+                <a:ext uri="{FF2B5EF4-FFF2-40B4-BE49-F238E27FC236}">
+                  <a16:creationId xmlns:a16="http://schemas.microsoft.com/office/drawing/2014/main" id="{4F0F1A37-EFF8-52F1-01E0-5DDC6AF1FE45}"/>
+                </a:ext>
+              </a:extLst>
+            </p:cNvPr>
+            <p:cNvSpPr/>
+            <p:nvPr/>
+          </p:nvSpPr>
+          <p:spPr>
+            <a:xfrm>
+              <a:off x="1959074" y="2262652"/>
+              <a:ext cx="1093470" cy="734251"/>
+            </a:xfrm>
+            <a:prstGeom prst="roundRect">
+              <a:avLst/>
+            </a:prstGeom>
+            <a:solidFill>
+              <a:schemeClr val="accent4">
+                <a:lumMod val="20000"/>
+                <a:lumOff val="80000"/>
+              </a:schemeClr>
+            </a:solidFill>
+            <a:ln>
+              <a:gradFill>
+                <a:gsLst>
+                  <a:gs pos="0">
+                    <a:schemeClr val="accent1">
+                      <a:lumMod val="5000"/>
+                      <a:lumOff val="95000"/>
+                    </a:schemeClr>
+                  </a:gs>
+                  <a:gs pos="74000">
+                    <a:schemeClr val="accent1">
+                      <a:lumMod val="45000"/>
+                      <a:lumOff val="55000"/>
+                    </a:schemeClr>
+                  </a:gs>
+                  <a:gs pos="83000">
+                    <a:schemeClr val="accent1">
+                      <a:lumMod val="45000"/>
+                      <a:lumOff val="55000"/>
+                    </a:schemeClr>
+                  </a:gs>
+                  <a:gs pos="100000">
+                    <a:schemeClr val="accent1">
+                      <a:lumMod val="30000"/>
+                      <a:lumOff val="70000"/>
+                    </a:schemeClr>
+                  </a:gs>
+                </a:gsLst>
+                <a:lin ang="5400000" scaled="1"/>
+              </a:gradFill>
+            </a:ln>
+            <a:effectLst>
+              <a:outerShdw blurRad="50800" dist="38100" dir="2700000" algn="tl" rotWithShape="0">
+                <a:prstClr val="black">
+                  <a:alpha val="40000"/>
+                </a:prstClr>
+              </a:outerShdw>
+            </a:effectLst>
+          </p:spPr>
+          <p:style>
+            <a:lnRef idx="2">
+              <a:schemeClr val="accent4">
+                <a:shade val="15000"/>
+              </a:schemeClr>
+            </a:lnRef>
+            <a:fillRef idx="1">
+              <a:schemeClr val="accent4"/>
+            </a:fillRef>
+            <a:effectRef idx="0">
+              <a:schemeClr val="accent4"/>
+            </a:effectRef>
+            <a:fontRef idx="minor">
+              <a:schemeClr val="lt1"/>
+            </a:fontRef>
+          </p:style>
+          <p:txBody>
+            <a:bodyPr rtlCol="0" anchor="ctr"/>
+            <a:lstStyle/>
+            <a:p>
+              <a:pPr algn="ctr"/>
+              <a:r>
+                <a:rPr lang="en-US" altLang="zh-CN" sz="1600" dirty="0">
+                  <a:solidFill>
+                    <a:schemeClr val="tx1"/>
+                  </a:solidFill>
+                  <a:latin typeface="Cambria" panose="02040503050406030204" pitchFamily="18" charset="0"/>
+                  <a:ea typeface="Cambria" panose="02040503050406030204" pitchFamily="18" charset="0"/>
+                </a:rPr>
+                <a:t>Structure model</a:t>
+              </a:r>
+              <a:endParaRPr lang="zh-CN" altLang="en-US" sz="1600" dirty="0">
                 <a:solidFill>
                   <a:schemeClr val="tx1"/>
                 </a:solidFill>
                 <a:latin typeface="Cambria" panose="02040503050406030204" pitchFamily="18" charset="0"/>
-                <a:ea typeface="Cambria" panose="02040503050406030204" pitchFamily="18" charset="0"/>
-              </a:rPr>
-              <a:t>Structure model</a:t>
-            </a:r>
-            <a:endParaRPr lang="zh-CN" altLang="en-US" sz="1600" dirty="0">
-              <a:solidFill>
-                <a:schemeClr val="tx1"/>
-              </a:solidFill>
-              <a:latin typeface="Cambria" panose="02040503050406030204" pitchFamily="18" charset="0"/>
-            </a:endParaRPr>
-          </a:p>
-        </p:txBody>
-      </p:sp>
-      <p:cxnSp>
-        <p:nvCxnSpPr>
-          <p:cNvPr id="31" name="直接箭头连接符 30">
-            <a:extLst>
-              <a:ext uri="{FF2B5EF4-FFF2-40B4-BE49-F238E27FC236}">
-                <a16:creationId xmlns:a16="http://schemas.microsoft.com/office/drawing/2014/main" id="{9470A5BF-4615-0CA0-92CA-BC22A228B7EE}"/>
-              </a:ext>
-            </a:extLst>
-          </p:cNvPr>
-          <p:cNvCxnSpPr>
-            <a:cxnSpLocks/>
-          </p:cNvCxnSpPr>
+              </a:endParaRPr>
+            </a:p>
+          </p:txBody>
+        </p:sp>
+      </p:grpSp>
+      <p:sp>
+        <p:nvSpPr>
+          <p:cNvPr id="39" name="矩形: 圆角 38">
+            <a:extLst>
+              <a:ext uri="{FF2B5EF4-FFF2-40B4-BE49-F238E27FC236}">
+                <a16:creationId xmlns:a16="http://schemas.microsoft.com/office/drawing/2014/main" id="{B649D6BE-5B06-8BE1-638B-59E7C71CA857}"/>
+              </a:ext>
+            </a:extLst>
+          </p:cNvPr>
+          <p:cNvSpPr/>
           <p:nvPr/>
-        </p:nvCxnSpPr>
+        </p:nvSpPr>
         <p:spPr>
           <a:xfrm>
-            <a:off x="3127882" y="2645337"/>
-            <a:ext cx="626913" cy="5288"/>
-          </a:xfrm>
-          <a:prstGeom prst="straightConnector1">
-            <a:avLst/>
-          </a:prstGeom>
-          <a:ln>
-            <a:tailEnd type="triangle"/>
-          </a:ln>
-        </p:spPr>
-        <p:style>
-          <a:lnRef idx="2">
-            <a:schemeClr val="accent1"/>
-          </a:lnRef>
-          <a:fillRef idx="0">
-            <a:schemeClr val="accent1"/>
-          </a:fillRef>
-          <a:effectRef idx="1">
-            <a:schemeClr val="accent1"/>
-          </a:effectRef>
-          <a:fontRef idx="minor">
-            <a:schemeClr val="tx1"/>
-          </a:fontRef>
-        </p:style>
-      </p:cxnSp>
-      <p:cxnSp>
-        <p:nvCxnSpPr>
-          <p:cNvPr id="32" name="直接箭头连接符 31">
-            <a:extLst>
-              <a:ext uri="{FF2B5EF4-FFF2-40B4-BE49-F238E27FC236}">
-                <a16:creationId xmlns:a16="http://schemas.microsoft.com/office/drawing/2014/main" id="{814B8A38-4F06-1609-0CE7-59ADA9595C44}"/>
-              </a:ext>
-            </a:extLst>
-          </p:cNvPr>
-          <p:cNvCxnSpPr>
-            <a:cxnSpLocks/>
-          </p:cNvCxnSpPr>
-          <p:nvPr/>
-        </p:nvCxnSpPr>
-        <p:spPr>
-          <a:xfrm>
-            <a:off x="3205817" y="2487960"/>
-            <a:ext cx="631474" cy="16872"/>
-          </a:xfrm>
-          <a:prstGeom prst="straightConnector1">
-            <a:avLst/>
-          </a:prstGeom>
-          <a:ln>
-            <a:tailEnd type="triangle"/>
-          </a:ln>
-        </p:spPr>
-        <p:style>
-          <a:lnRef idx="2">
-            <a:schemeClr val="accent1"/>
-          </a:lnRef>
-          <a:fillRef idx="0">
-            <a:schemeClr val="accent1"/>
-          </a:fillRef>
-          <a:effectRef idx="1">
-            <a:schemeClr val="accent1"/>
-          </a:effectRef>
-          <a:fontRef idx="minor">
-            <a:schemeClr val="tx1"/>
-          </a:fontRef>
-        </p:style>
-      </p:cxnSp>
-      <p:cxnSp>
-        <p:nvCxnSpPr>
-          <p:cNvPr id="33" name="直接箭头连接符 32">
-            <a:extLst>
-              <a:ext uri="{FF2B5EF4-FFF2-40B4-BE49-F238E27FC236}">
-                <a16:creationId xmlns:a16="http://schemas.microsoft.com/office/drawing/2014/main" id="{1EBCD5F8-CBD6-B024-04EB-77C7D0FEA77D}"/>
-              </a:ext>
-            </a:extLst>
-          </p:cNvPr>
-          <p:cNvCxnSpPr>
-            <a:cxnSpLocks/>
-          </p:cNvCxnSpPr>
-          <p:nvPr/>
-        </p:nvCxnSpPr>
-        <p:spPr>
-          <a:xfrm>
-            <a:off x="3270125" y="2364579"/>
-            <a:ext cx="679540" cy="0"/>
-          </a:xfrm>
-          <a:prstGeom prst="straightConnector1">
-            <a:avLst/>
-          </a:prstGeom>
-          <a:ln>
-            <a:tailEnd type="triangle"/>
-          </a:ln>
-        </p:spPr>
-        <p:style>
-          <a:lnRef idx="2">
-            <a:schemeClr val="accent1"/>
-          </a:lnRef>
-          <a:fillRef idx="0">
-            <a:schemeClr val="accent1"/>
-          </a:fillRef>
-          <a:effectRef idx="1">
-            <a:schemeClr val="accent1"/>
-          </a:effectRef>
-          <a:fontRef idx="minor">
-            <a:schemeClr val="tx1"/>
-          </a:fontRef>
-        </p:style>
-      </p:cxnSp>
-      <p:sp>
-        <p:nvSpPr>
-          <p:cNvPr id="39" name="矩形: 圆角 38">
-            <a:extLst>
-              <a:ext uri="{FF2B5EF4-FFF2-40B4-BE49-F238E27FC236}">
-                <a16:creationId xmlns:a16="http://schemas.microsoft.com/office/drawing/2014/main" id="{B649D6BE-5B06-8BE1-638B-59E7C71CA857}"/>
-              </a:ext>
-            </a:extLst>
-          </p:cNvPr>
-          <p:cNvSpPr/>
-          <p:nvPr/>
-        </p:nvSpPr>
-        <p:spPr>
-          <a:xfrm>
-            <a:off x="1816465" y="4054189"/>
+            <a:off x="1878525" y="4166144"/>
             <a:ext cx="1270674" cy="503212"/>
           </a:xfrm>
           <a:prstGeom prst="roundRect">
             <a:avLst/>
           </a:prstGeom>
           <a:solidFill>
-            <a:schemeClr val="tx2">
-              <a:lumMod val="10000"/>
-              <a:lumOff val="90000"/>
+            <a:schemeClr val="accent2">
+              <a:lumMod val="20000"/>
+              <a:lumOff val="80000"/>
             </a:schemeClr>
           </a:solidFill>
+          <a:ln>
+            <a:noFill/>
+          </a:ln>
           <a:effectLst>
             <a:outerShdw blurRad="50800" dist="38100" dir="2700000" algn="tl" rotWithShape="0">
               <a:prstClr val="black">
@@ -4476,8 +5148,8 @@
         </p:nvCxnSpPr>
         <p:spPr>
           <a:xfrm>
-            <a:off x="3087139" y="4305795"/>
-            <a:ext cx="583880" cy="0"/>
+            <a:off x="3149199" y="4417750"/>
+            <a:ext cx="435571" cy="5906"/>
           </a:xfrm>
           <a:prstGeom prst="straightConnector1">
             <a:avLst/>
@@ -4515,17 +5187,18 @@
         </p:nvSpPr>
         <p:spPr>
           <a:xfrm>
-            <a:off x="3671019" y="3988701"/>
+            <a:off x="3584770" y="4106562"/>
             <a:ext cx="1822426" cy="634188"/>
           </a:xfrm>
           <a:prstGeom prst="roundRect">
             <a:avLst/>
           </a:prstGeom>
           <a:solidFill>
-            <a:schemeClr val="bg1">
-              <a:lumMod val="95000"/>
-            </a:schemeClr>
+            <a:schemeClr val="accent2"/>
           </a:solidFill>
+          <a:ln>
+            <a:noFill/>
+          </a:ln>
           <a:effectLst>
             <a:outerShdw blurRad="50800" dist="38100" dir="2700000" algn="tl" rotWithShape="0">
               <a:prstClr val="black">
@@ -4556,7 +5229,7 @@
           <a:p>
             <a:pPr algn="ctr"/>
             <a:r>
-              <a:rPr lang="en-US" altLang="zh-CN" sz="1400" dirty="0">
+              <a:rPr lang="en-US" altLang="zh-CN" sz="1400">
                 <a:solidFill>
                   <a:schemeClr val="tx1"/>
                 </a:solidFill>
@@ -4566,18 +5239,18 @@
               <a:t>Bidirectional</a:t>
             </a:r>
             <a:r>
-              <a:rPr lang="en-US" altLang="zh-CN" sz="1600" dirty="0"/>
+              <a:rPr lang="en-US" altLang="zh-CN" sz="1600"/>
               <a:t> </a:t>
             </a:r>
             <a:r>
-              <a:rPr lang="en-US" altLang="zh-CN" sz="1400" dirty="0" err="1">
+              <a:rPr lang="en-US" altLang="zh-CN" sz="1400">
                 <a:solidFill>
                   <a:schemeClr val="tx1"/>
                 </a:solidFill>
                 <a:latin typeface="Cambria" panose="02040503050406030204" pitchFamily="18" charset="0"/>
                 <a:ea typeface="Cambria" panose="02040503050406030204" pitchFamily="18" charset="0"/>
               </a:rPr>
-              <a:t>Manba</a:t>
+              <a:t>Mamba</a:t>
             </a:r>
             <a:endParaRPr lang="zh-CN" altLang="en-US" sz="1400" dirty="0">
               <a:solidFill>
@@ -4613,7 +5286,7 @@
               <a:alpha val="20000"/>
             </a:schemeClr>
           </a:solidFill>
-          <a:ln w="6350"/>
+          <a:ln w="19050"/>
           <a:effectLst>
             <a:outerShdw blurRad="50800" dist="38100" dir="2700000" algn="tl" rotWithShape="0">
               <a:prstClr val="black">
@@ -4672,7 +5345,7 @@
               <a:alpha val="20000"/>
             </a:schemeClr>
           </a:solidFill>
-          <a:ln w="6350"/>
+          <a:ln w="19050"/>
           <a:effectLst>
             <a:outerShdw blurRad="50800" dist="38100" dir="2700000" algn="tl" rotWithShape="0">
               <a:prstClr val="black">
@@ -4731,7 +5404,7 @@
               <a:alpha val="20000"/>
             </a:schemeClr>
           </a:solidFill>
-          <a:ln w="6350"/>
+          <a:ln w="19050"/>
           <a:effectLst>
             <a:outerShdw blurRad="50800" dist="38100" dir="2700000" algn="tl" rotWithShape="0">
               <a:prstClr val="black">
@@ -4781,8 +5454,8 @@
         </p:nvCxnSpPr>
         <p:spPr>
           <a:xfrm flipV="1">
-            <a:off x="4158717" y="2208356"/>
-            <a:ext cx="1472463" cy="20061"/>
+            <a:off x="4158717" y="2174133"/>
+            <a:ext cx="1585564" cy="54284"/>
           </a:xfrm>
           <a:prstGeom prst="straightConnector1">
             <a:avLst/>
@@ -4823,7 +5496,7 @@
         <p:spPr>
           <a:xfrm>
             <a:off x="4648168" y="2656580"/>
-            <a:ext cx="950932" cy="120884"/>
+            <a:ext cx="1073510" cy="67570"/>
           </a:xfrm>
           <a:prstGeom prst="straightConnector1">
             <a:avLst/>
@@ -4864,7 +5537,7 @@
         <p:spPr>
           <a:xfrm>
             <a:off x="5339304" y="2461923"/>
-            <a:ext cx="326990" cy="30595"/>
+            <a:ext cx="466416" cy="0"/>
           </a:xfrm>
           <a:prstGeom prst="straightConnector1">
             <a:avLst/>
@@ -4902,7 +5575,7 @@
         </p:nvSpPr>
         <p:spPr>
           <a:xfrm>
-            <a:off x="7687673" y="2765045"/>
+            <a:off x="8378464" y="3087648"/>
             <a:ext cx="1558290" cy="858253"/>
           </a:xfrm>
           <a:prstGeom prst="roundRect">
@@ -4910,226 +5583,12 @@
           </a:prstGeom>
           <a:solidFill>
             <a:schemeClr val="bg1">
-              <a:lumMod val="95000"/>
+              <a:lumMod val="85000"/>
             </a:schemeClr>
           </a:solidFill>
-        </p:spPr>
-        <p:style>
-          <a:lnRef idx="2">
-            <a:schemeClr val="accent1">
-              <a:shade val="15000"/>
-            </a:schemeClr>
-          </a:lnRef>
-          <a:fillRef idx="1">
-            <a:schemeClr val="accent1"/>
-          </a:fillRef>
-          <a:effectRef idx="0">
-            <a:schemeClr val="accent1"/>
-          </a:effectRef>
-          <a:fontRef idx="minor">
-            <a:schemeClr val="lt1"/>
-          </a:fontRef>
-        </p:style>
-        <p:txBody>
-          <a:bodyPr rtlCol="0" anchor="ctr"/>
-          <a:lstStyle/>
-          <a:p>
-            <a:pPr algn="ctr"/>
-            <a:r>
-              <a:rPr lang="en-US" altLang="zh-CN" sz="2000" dirty="0">
-                <a:solidFill>
-                  <a:schemeClr val="tx1"/>
-                </a:solidFill>
-                <a:latin typeface="Cambria" panose="02040503050406030204" pitchFamily="18" charset="0"/>
-                <a:ea typeface="Cambria" panose="02040503050406030204" pitchFamily="18" charset="0"/>
-              </a:rPr>
-              <a:t>Probability fusion</a:t>
-            </a:r>
-          </a:p>
-        </p:txBody>
-      </p:sp>
-      <p:cxnSp>
-        <p:nvCxnSpPr>
-          <p:cNvPr id="1048" name="连接符: 肘形 1047">
-            <a:extLst>
-              <a:ext uri="{FF2B5EF4-FFF2-40B4-BE49-F238E27FC236}">
-                <a16:creationId xmlns:a16="http://schemas.microsoft.com/office/drawing/2014/main" id="{E2957550-6453-5FAF-C095-BC5D0C369374}"/>
-              </a:ext>
-            </a:extLst>
-          </p:cNvPr>
-          <p:cNvCxnSpPr>
-            <a:cxnSpLocks/>
-            <a:stCxn id="58" idx="3"/>
-            <a:endCxn id="1045" idx="0"/>
-          </p:cNvCxnSpPr>
-          <p:nvPr/>
-        </p:nvCxnSpPr>
-        <p:spPr>
-          <a:xfrm>
-            <a:off x="7123311" y="2405297"/>
-            <a:ext cx="1343507" cy="359748"/>
-          </a:xfrm>
-          <a:prstGeom prst="bentConnector2">
-            <a:avLst/>
-          </a:prstGeom>
           <a:ln>
-            <a:tailEnd type="triangle"/>
+            <a:noFill/>
           </a:ln>
-        </p:spPr>
-        <p:style>
-          <a:lnRef idx="2">
-            <a:schemeClr val="accent1"/>
-          </a:lnRef>
-          <a:fillRef idx="0">
-            <a:schemeClr val="accent1"/>
-          </a:fillRef>
-          <a:effectRef idx="1">
-            <a:schemeClr val="accent1"/>
-          </a:effectRef>
-          <a:fontRef idx="minor">
-            <a:schemeClr val="tx1"/>
-          </a:fontRef>
-        </p:style>
-      </p:cxnSp>
-      <p:sp>
-        <p:nvSpPr>
-          <p:cNvPr id="1077" name="箭头: 右 1076">
-            <a:extLst>
-              <a:ext uri="{FF2B5EF4-FFF2-40B4-BE49-F238E27FC236}">
-                <a16:creationId xmlns:a16="http://schemas.microsoft.com/office/drawing/2014/main" id="{AD25ADFB-0A09-1044-2B9F-A618DC97F13A}"/>
-              </a:ext>
-            </a:extLst>
-          </p:cNvPr>
-          <p:cNvSpPr/>
-          <p:nvPr/>
-        </p:nvSpPr>
-        <p:spPr>
-          <a:xfrm>
-            <a:off x="9352409" y="3095096"/>
-            <a:ext cx="365760" cy="125317"/>
-          </a:xfrm>
-          <a:prstGeom prst="rightArrow">
-            <a:avLst/>
-          </a:prstGeom>
-        </p:spPr>
-        <p:style>
-          <a:lnRef idx="2">
-            <a:schemeClr val="accent1">
-              <a:shade val="15000"/>
-            </a:schemeClr>
-          </a:lnRef>
-          <a:fillRef idx="1">
-            <a:schemeClr val="accent1"/>
-          </a:fillRef>
-          <a:effectRef idx="0">
-            <a:schemeClr val="accent1"/>
-          </a:effectRef>
-          <a:fontRef idx="minor">
-            <a:schemeClr val="lt1"/>
-          </a:fontRef>
-        </p:style>
-        <p:txBody>
-          <a:bodyPr rtlCol="0" anchor="ctr"/>
-          <a:lstStyle/>
-          <a:p>
-            <a:pPr algn="ctr"/>
-            <a:endParaRPr lang="zh-CN" altLang="en-US"/>
-          </a:p>
-        </p:txBody>
-      </p:sp>
-      <p:sp>
-        <p:nvSpPr>
-          <p:cNvPr id="1078" name="矩形: 圆角 1077">
-            <a:extLst>
-              <a:ext uri="{FF2B5EF4-FFF2-40B4-BE49-F238E27FC236}">
-                <a16:creationId xmlns:a16="http://schemas.microsoft.com/office/drawing/2014/main" id="{022E3DED-A6C3-2050-DABD-851EDCF2BD92}"/>
-              </a:ext>
-            </a:extLst>
-          </p:cNvPr>
-          <p:cNvSpPr/>
-          <p:nvPr/>
-        </p:nvSpPr>
-        <p:spPr>
-          <a:xfrm>
-            <a:off x="9824615" y="2430266"/>
-            <a:ext cx="966285" cy="1454976"/>
-          </a:xfrm>
-          <a:prstGeom prst="roundRect">
-            <a:avLst/>
-          </a:prstGeom>
-          <a:solidFill>
-            <a:schemeClr val="accent4">
-              <a:lumMod val="20000"/>
-              <a:lumOff val="80000"/>
-            </a:schemeClr>
-          </a:solidFill>
-        </p:spPr>
-        <p:style>
-          <a:lnRef idx="2">
-            <a:schemeClr val="accent1">
-              <a:shade val="15000"/>
-            </a:schemeClr>
-          </a:lnRef>
-          <a:fillRef idx="1">
-            <a:schemeClr val="accent1"/>
-          </a:fillRef>
-          <a:effectRef idx="0">
-            <a:schemeClr val="accent1"/>
-          </a:effectRef>
-          <a:fontRef idx="minor">
-            <a:schemeClr val="lt1"/>
-          </a:fontRef>
-        </p:style>
-        <p:txBody>
-          <a:bodyPr rtlCol="0" anchor="ctr"/>
-          <a:lstStyle/>
-          <a:p>
-            <a:pPr algn="ctr"/>
-            <a:r>
-              <a:rPr lang="en-US" altLang="zh-CN" sz="1200" dirty="0">
-                <a:solidFill>
-                  <a:schemeClr val="tx1"/>
-                </a:solidFill>
-                <a:latin typeface="Cambria" panose="02040503050406030204" pitchFamily="18" charset="0"/>
-                <a:ea typeface="Cambria" panose="02040503050406030204" pitchFamily="18" charset="0"/>
-              </a:rPr>
-              <a:t>Peptide toxicity prediction</a:t>
-            </a:r>
-            <a:endParaRPr lang="zh-CN" altLang="en-US" sz="1200" dirty="0">
-              <a:solidFill>
-                <a:schemeClr val="tx1"/>
-              </a:solidFill>
-              <a:latin typeface="Cambria" panose="02040503050406030204" pitchFamily="18" charset="0"/>
-            </a:endParaRPr>
-          </a:p>
-        </p:txBody>
-      </p:sp>
-      <p:sp>
-        <p:nvSpPr>
-          <p:cNvPr id="28" name="矩形: 圆角 27">
-            <a:extLst>
-              <a:ext uri="{FF2B5EF4-FFF2-40B4-BE49-F238E27FC236}">
-                <a16:creationId xmlns:a16="http://schemas.microsoft.com/office/drawing/2014/main" id="{D4C861B6-4351-8E8B-E048-1618ED1148BE}"/>
-              </a:ext>
-            </a:extLst>
-          </p:cNvPr>
-          <p:cNvSpPr/>
-          <p:nvPr/>
-        </p:nvSpPr>
-        <p:spPr>
-          <a:xfrm>
-            <a:off x="5837579" y="4053585"/>
-            <a:ext cx="1721956" cy="503816"/>
-          </a:xfrm>
-          <a:prstGeom prst="roundRect">
-            <a:avLst/>
-          </a:prstGeom>
-          <a:solidFill>
-            <a:schemeClr val="accent4">
-              <a:lumMod val="20000"/>
-              <a:lumOff val="80000"/>
-            </a:schemeClr>
-          </a:solidFill>
           <a:effectLst>
             <a:outerShdw blurRad="50800" dist="38100" dir="2700000" algn="tl" rotWithShape="0">
               <a:prstClr val="black">
@@ -5160,6 +5619,296 @@
           <a:p>
             <a:pPr algn="ctr"/>
             <a:r>
+              <a:rPr lang="en-US" altLang="zh-CN" sz="2000" dirty="0">
+                <a:solidFill>
+                  <a:schemeClr val="tx1"/>
+                </a:solidFill>
+                <a:latin typeface="Cambria" panose="02040503050406030204" pitchFamily="18" charset="0"/>
+                <a:ea typeface="Cambria" panose="02040503050406030204" pitchFamily="18" charset="0"/>
+              </a:rPr>
+              <a:t>Probability fusion</a:t>
+            </a:r>
+          </a:p>
+        </p:txBody>
+      </p:sp>
+      <p:cxnSp>
+        <p:nvCxnSpPr>
+          <p:cNvPr id="1048" name="连接符: 肘形 1047">
+            <a:extLst>
+              <a:ext uri="{FF2B5EF4-FFF2-40B4-BE49-F238E27FC236}">
+                <a16:creationId xmlns:a16="http://schemas.microsoft.com/office/drawing/2014/main" id="{E2957550-6453-5FAF-C095-BC5D0C369374}"/>
+              </a:ext>
+            </a:extLst>
+          </p:cNvPr>
+          <p:cNvCxnSpPr>
+            <a:cxnSpLocks/>
+            <a:stCxn id="58" idx="3"/>
+            <a:endCxn id="1045" idx="0"/>
+          </p:cNvCxnSpPr>
+          <p:nvPr/>
+        </p:nvCxnSpPr>
+        <p:spPr>
+          <a:xfrm>
+            <a:off x="7191868" y="2456455"/>
+            <a:ext cx="1965741" cy="631193"/>
+          </a:xfrm>
+          <a:prstGeom prst="bentConnector2">
+            <a:avLst/>
+          </a:prstGeom>
+          <a:ln>
+            <a:tailEnd type="triangle"/>
+          </a:ln>
+        </p:spPr>
+        <p:style>
+          <a:lnRef idx="2">
+            <a:schemeClr val="accent1"/>
+          </a:lnRef>
+          <a:fillRef idx="0">
+            <a:schemeClr val="accent1"/>
+          </a:fillRef>
+          <a:effectRef idx="1">
+            <a:schemeClr val="accent1"/>
+          </a:effectRef>
+          <a:fontRef idx="minor">
+            <a:schemeClr val="tx1"/>
+          </a:fontRef>
+        </p:style>
+      </p:cxnSp>
+      <p:sp>
+        <p:nvSpPr>
+          <p:cNvPr id="1077" name="箭头: 右 1076">
+            <a:extLst>
+              <a:ext uri="{FF2B5EF4-FFF2-40B4-BE49-F238E27FC236}">
+                <a16:creationId xmlns:a16="http://schemas.microsoft.com/office/drawing/2014/main" id="{AD25ADFB-0A09-1044-2B9F-A618DC97F13A}"/>
+              </a:ext>
+            </a:extLst>
+          </p:cNvPr>
+          <p:cNvSpPr/>
+          <p:nvPr/>
+        </p:nvSpPr>
+        <p:spPr>
+          <a:xfrm>
+            <a:off x="10019006" y="3449091"/>
+            <a:ext cx="365760" cy="125317"/>
+          </a:xfrm>
+          <a:prstGeom prst="rightArrow">
+            <a:avLst/>
+          </a:prstGeom>
+          <a:gradFill flip="none" rotWithShape="1">
+            <a:gsLst>
+              <a:gs pos="46000">
+                <a:schemeClr val="accent1">
+                  <a:lumMod val="40000"/>
+                  <a:lumOff val="60000"/>
+                </a:schemeClr>
+              </a:gs>
+              <a:gs pos="0">
+                <a:schemeClr val="accent1">
+                  <a:lumMod val="67000"/>
+                </a:schemeClr>
+              </a:gs>
+              <a:gs pos="16000">
+                <a:schemeClr val="accent1">
+                  <a:lumMod val="97000"/>
+                  <a:lumOff val="3000"/>
+                </a:schemeClr>
+              </a:gs>
+              <a:gs pos="61000">
+                <a:schemeClr val="accent1">
+                  <a:lumMod val="20000"/>
+                  <a:lumOff val="80000"/>
+                </a:schemeClr>
+              </a:gs>
+            </a:gsLst>
+            <a:lin ang="10800000" scaled="1"/>
+            <a:tileRect/>
+          </a:gradFill>
+          <a:ln>
+            <a:noFill/>
+          </a:ln>
+        </p:spPr>
+        <p:style>
+          <a:lnRef idx="2">
+            <a:schemeClr val="accent1">
+              <a:shade val="15000"/>
+            </a:schemeClr>
+          </a:lnRef>
+          <a:fillRef idx="1">
+            <a:schemeClr val="accent1"/>
+          </a:fillRef>
+          <a:effectRef idx="0">
+            <a:schemeClr val="accent1"/>
+          </a:effectRef>
+          <a:fontRef idx="minor">
+            <a:schemeClr val="lt1"/>
+          </a:fontRef>
+        </p:style>
+        <p:txBody>
+          <a:bodyPr rtlCol="0" anchor="ctr"/>
+          <a:lstStyle/>
+          <a:p>
+            <a:pPr algn="ctr"/>
+            <a:endParaRPr lang="zh-CN" altLang="en-US"/>
+          </a:p>
+        </p:txBody>
+      </p:sp>
+      <p:sp>
+        <p:nvSpPr>
+          <p:cNvPr id="1078" name="矩形: 圆角 1077">
+            <a:extLst>
+              <a:ext uri="{FF2B5EF4-FFF2-40B4-BE49-F238E27FC236}">
+                <a16:creationId xmlns:a16="http://schemas.microsoft.com/office/drawing/2014/main" id="{022E3DED-A6C3-2050-DABD-851EDCF2BD92}"/>
+              </a:ext>
+            </a:extLst>
+          </p:cNvPr>
+          <p:cNvSpPr/>
+          <p:nvPr/>
+        </p:nvSpPr>
+        <p:spPr>
+          <a:xfrm>
+            <a:off x="10481951" y="2831274"/>
+            <a:ext cx="966285" cy="1454976"/>
+          </a:xfrm>
+          <a:prstGeom prst="roundRect">
+            <a:avLst/>
+          </a:prstGeom>
+          <a:solidFill>
+            <a:schemeClr val="accent4">
+              <a:lumMod val="20000"/>
+              <a:lumOff val="80000"/>
+            </a:schemeClr>
+          </a:solidFill>
+          <a:ln>
+            <a:gradFill>
+              <a:gsLst>
+                <a:gs pos="0">
+                  <a:schemeClr val="accent1">
+                    <a:lumMod val="5000"/>
+                    <a:lumOff val="95000"/>
+                  </a:schemeClr>
+                </a:gs>
+                <a:gs pos="74000">
+                  <a:schemeClr val="accent1">
+                    <a:lumMod val="45000"/>
+                    <a:lumOff val="55000"/>
+                  </a:schemeClr>
+                </a:gs>
+                <a:gs pos="83000">
+                  <a:schemeClr val="accent1">
+                    <a:lumMod val="45000"/>
+                    <a:lumOff val="55000"/>
+                  </a:schemeClr>
+                </a:gs>
+                <a:gs pos="100000">
+                  <a:schemeClr val="accent1">
+                    <a:lumMod val="30000"/>
+                    <a:lumOff val="70000"/>
+                  </a:schemeClr>
+                </a:gs>
+              </a:gsLst>
+              <a:lin ang="5400000" scaled="1"/>
+            </a:gradFill>
+          </a:ln>
+        </p:spPr>
+        <p:style>
+          <a:lnRef idx="2">
+            <a:schemeClr val="accent1">
+              <a:shade val="15000"/>
+            </a:schemeClr>
+          </a:lnRef>
+          <a:fillRef idx="1">
+            <a:schemeClr val="accent1"/>
+          </a:fillRef>
+          <a:effectRef idx="0">
+            <a:schemeClr val="accent1"/>
+          </a:effectRef>
+          <a:fontRef idx="minor">
+            <a:schemeClr val="lt1"/>
+          </a:fontRef>
+        </p:style>
+        <p:txBody>
+          <a:bodyPr rtlCol="0" anchor="ctr"/>
+          <a:lstStyle/>
+          <a:p>
+            <a:pPr algn="ctr"/>
+            <a:r>
+              <a:rPr lang="en-US" altLang="zh-CN" sz="1200" dirty="0">
+                <a:solidFill>
+                  <a:schemeClr val="tx1"/>
+                </a:solidFill>
+                <a:latin typeface="Cambria" panose="02040503050406030204" pitchFamily="18" charset="0"/>
+                <a:ea typeface="Cambria" panose="02040503050406030204" pitchFamily="18" charset="0"/>
+              </a:rPr>
+              <a:t>Peptide toxicity prediction</a:t>
+            </a:r>
+            <a:endParaRPr lang="zh-CN" altLang="en-US" sz="1200" dirty="0">
+              <a:solidFill>
+                <a:schemeClr val="tx1"/>
+              </a:solidFill>
+              <a:latin typeface="Cambria" panose="02040503050406030204" pitchFamily="18" charset="0"/>
+            </a:endParaRPr>
+          </a:p>
+        </p:txBody>
+      </p:sp>
+      <p:sp>
+        <p:nvSpPr>
+          <p:cNvPr id="28" name="矩形: 圆角 27">
+            <a:extLst>
+              <a:ext uri="{FF2B5EF4-FFF2-40B4-BE49-F238E27FC236}">
+                <a16:creationId xmlns:a16="http://schemas.microsoft.com/office/drawing/2014/main" id="{D4C861B6-4351-8E8B-E048-1618ED1148BE}"/>
+              </a:ext>
+            </a:extLst>
+          </p:cNvPr>
+          <p:cNvSpPr/>
+          <p:nvPr/>
+        </p:nvSpPr>
+        <p:spPr>
+          <a:xfrm>
+            <a:off x="5837579" y="3972548"/>
+            <a:ext cx="2218117" cy="889799"/>
+          </a:xfrm>
+          <a:prstGeom prst="roundRect">
+            <a:avLst/>
+          </a:prstGeom>
+          <a:solidFill>
+            <a:schemeClr val="accent2">
+              <a:lumMod val="40000"/>
+              <a:lumOff val="60000"/>
+            </a:schemeClr>
+          </a:solidFill>
+          <a:ln>
+            <a:noFill/>
+          </a:ln>
+          <a:effectLst>
+            <a:outerShdw blurRad="50800" dist="38100" dir="2700000" algn="tl" rotWithShape="0">
+              <a:prstClr val="black">
+                <a:alpha val="40000"/>
+              </a:prstClr>
+            </a:outerShdw>
+          </a:effectLst>
+        </p:spPr>
+        <p:style>
+          <a:lnRef idx="2">
+            <a:schemeClr val="accent1">
+              <a:shade val="15000"/>
+            </a:schemeClr>
+          </a:lnRef>
+          <a:fillRef idx="1">
+            <a:schemeClr val="accent1"/>
+          </a:fillRef>
+          <a:effectRef idx="0">
+            <a:schemeClr val="accent1"/>
+          </a:effectRef>
+          <a:fontRef idx="minor">
+            <a:schemeClr val="lt1"/>
+          </a:fontRef>
+        </p:style>
+        <p:txBody>
+          <a:bodyPr rtlCol="0" anchor="ctr"/>
+          <a:lstStyle/>
+          <a:p>
+            <a:pPr algn="ctr"/>
+            <a:r>
               <a:rPr lang="en-US" altLang="zh-CN" sz="1400" dirty="0">
                 <a:solidFill>
                   <a:schemeClr val="tx1"/>
@@ -5188,6 +5937,7 @@
             </a:extLst>
           </p:cNvPr>
           <p:cNvCxnSpPr>
+            <a:cxnSpLocks/>
             <a:stCxn id="43" idx="3"/>
             <a:endCxn id="28" idx="1"/>
           </p:cNvCxnSpPr>
@@ -5195,8 +5945,8 @@
         </p:nvCxnSpPr>
         <p:spPr>
           <a:xfrm flipV="1">
-            <a:off x="5493445" y="4305493"/>
-            <a:ext cx="344134" cy="302"/>
+            <a:off x="5407196" y="4417448"/>
+            <a:ext cx="430383" cy="6208"/>
           </a:xfrm>
           <a:prstGeom prst="straightConnector1">
             <a:avLst/>
@@ -5230,6 +5980,7 @@
             </a:extLst>
           </p:cNvPr>
           <p:cNvCxnSpPr>
+            <a:cxnSpLocks/>
             <a:stCxn id="28" idx="3"/>
             <a:endCxn id="1045" idx="2"/>
           </p:cNvCxnSpPr>
@@ -5237,8 +5988,8 @@
         </p:nvCxnSpPr>
         <p:spPr>
           <a:xfrm flipV="1">
-            <a:off x="7559535" y="3623298"/>
-            <a:ext cx="907283" cy="682195"/>
+            <a:off x="8055696" y="3945901"/>
+            <a:ext cx="1101913" cy="471547"/>
           </a:xfrm>
           <a:prstGeom prst="bentConnector2">
             <a:avLst/>
@@ -5262,10 +6013,442 @@
           </a:fontRef>
         </p:style>
       </p:cxnSp>
+      <p:sp>
+        <p:nvSpPr>
+          <p:cNvPr id="13" name="AutoShape 2" descr="多肽生物图 透明背景 的图像结果">
+            <a:extLst>
+              <a:ext uri="{FF2B5EF4-FFF2-40B4-BE49-F238E27FC236}">
+                <a16:creationId xmlns:a16="http://schemas.microsoft.com/office/drawing/2014/main" id="{0E926FCC-F9FD-BE0F-9124-833ACB87B701}"/>
+              </a:ext>
+            </a:extLst>
+          </p:cNvPr>
+          <p:cNvSpPr>
+            <a:spLocks noChangeAspect="1" noChangeArrowheads="1"/>
+          </p:cNvSpPr>
+          <p:nvPr/>
+        </p:nvSpPr>
+        <p:spPr bwMode="auto">
+          <a:xfrm>
+            <a:off x="4824413" y="2571750"/>
+            <a:ext cx="2543175" cy="1714500"/>
+          </a:xfrm>
+          <a:prstGeom prst="rect">
+            <a:avLst/>
+          </a:prstGeom>
+          <a:noFill/>
+          <a:extLst>
+            <a:ext uri="{909E8E84-426E-40DD-AFC4-6F175D3DCCD1}">
+              <a14:hiddenFill xmlns:a14="http://schemas.microsoft.com/office/drawing/2010/main">
+                <a:solidFill>
+                  <a:srgbClr val="FFFFFF"/>
+                </a:solidFill>
+              </a14:hiddenFill>
+            </a:ext>
+          </a:extLst>
+        </p:spPr>
+        <p:txBody>
+          <a:bodyPr vert="horz" wrap="square" lIns="91440" tIns="45720" rIns="91440" bIns="45720" numCol="1" anchor="t" anchorCtr="0" compatLnSpc="1">
+            <a:prstTxWarp prst="textNoShape">
+              <a:avLst/>
+            </a:prstTxWarp>
+          </a:bodyPr>
+          <a:lstStyle/>
+          <a:p>
+            <a:endParaRPr lang="zh-CN" altLang="en-US"/>
+          </a:p>
+        </p:txBody>
+      </p:sp>
+      <p:sp>
+        <p:nvSpPr>
+          <p:cNvPr id="15" name="AutoShape 4" descr="多肽生物图 透明背景 的图像结果">
+            <a:extLst>
+              <a:ext uri="{FF2B5EF4-FFF2-40B4-BE49-F238E27FC236}">
+                <a16:creationId xmlns:a16="http://schemas.microsoft.com/office/drawing/2014/main" id="{B68BEC1F-C53C-E64B-458A-3518095FBBDB}"/>
+              </a:ext>
+            </a:extLst>
+          </p:cNvPr>
+          <p:cNvSpPr>
+            <a:spLocks noChangeAspect="1" noChangeArrowheads="1"/>
+          </p:cNvSpPr>
+          <p:nvPr/>
+        </p:nvSpPr>
+        <p:spPr bwMode="auto">
+          <a:xfrm>
+            <a:off x="4976813" y="2724150"/>
+            <a:ext cx="2543175" cy="1714500"/>
+          </a:xfrm>
+          <a:prstGeom prst="rect">
+            <a:avLst/>
+          </a:prstGeom>
+          <a:noFill/>
+          <a:extLst>
+            <a:ext uri="{909E8E84-426E-40DD-AFC4-6F175D3DCCD1}">
+              <a14:hiddenFill xmlns:a14="http://schemas.microsoft.com/office/drawing/2010/main">
+                <a:solidFill>
+                  <a:srgbClr val="FFFFFF"/>
+                </a:solidFill>
+              </a14:hiddenFill>
+            </a:ext>
+          </a:extLst>
+        </p:spPr>
+        <p:txBody>
+          <a:bodyPr vert="horz" wrap="square" lIns="91440" tIns="45720" rIns="91440" bIns="45720" numCol="1" anchor="t" anchorCtr="0" compatLnSpc="1">
+            <a:prstTxWarp prst="textNoShape">
+              <a:avLst/>
+            </a:prstTxWarp>
+          </a:bodyPr>
+          <a:lstStyle/>
+          <a:p>
+            <a:endParaRPr lang="zh-CN" altLang="en-US"/>
+          </a:p>
+        </p:txBody>
+      </p:sp>
+      <p:cxnSp>
+        <p:nvCxnSpPr>
+          <p:cNvPr id="21" name="直接箭头连接符 20">
+            <a:extLst>
+              <a:ext uri="{FF2B5EF4-FFF2-40B4-BE49-F238E27FC236}">
+                <a16:creationId xmlns:a16="http://schemas.microsoft.com/office/drawing/2014/main" id="{AF390851-9CA8-5E99-96FD-C23EB5E34819}"/>
+              </a:ext>
+            </a:extLst>
+          </p:cNvPr>
+          <p:cNvCxnSpPr>
+            <a:cxnSpLocks/>
+          </p:cNvCxnSpPr>
+          <p:nvPr/>
+        </p:nvCxnSpPr>
+        <p:spPr>
+          <a:xfrm>
+            <a:off x="3197825" y="2504832"/>
+            <a:ext cx="224163" cy="0"/>
+          </a:xfrm>
+          <a:prstGeom prst="straightConnector1">
+            <a:avLst/>
+          </a:prstGeom>
+          <a:ln>
+            <a:tailEnd type="triangle"/>
+          </a:ln>
+        </p:spPr>
+        <p:style>
+          <a:lnRef idx="2">
+            <a:schemeClr val="accent1"/>
+          </a:lnRef>
+          <a:fillRef idx="0">
+            <a:schemeClr val="accent1"/>
+          </a:fillRef>
+          <a:effectRef idx="1">
+            <a:schemeClr val="accent1"/>
+          </a:effectRef>
+          <a:fontRef idx="minor">
+            <a:schemeClr val="tx1"/>
+          </a:fontRef>
+        </p:style>
+      </p:cxnSp>
+      <p:sp>
+        <p:nvSpPr>
+          <p:cNvPr id="1038" name="文本框 1037">
+            <a:extLst>
+              <a:ext uri="{FF2B5EF4-FFF2-40B4-BE49-F238E27FC236}">
+                <a16:creationId xmlns:a16="http://schemas.microsoft.com/office/drawing/2014/main" id="{BF4DEFD2-C5E6-74D5-A805-4901F66AC3B3}"/>
+              </a:ext>
+            </a:extLst>
+          </p:cNvPr>
+          <p:cNvSpPr txBox="1"/>
+          <p:nvPr/>
+        </p:nvSpPr>
+        <p:spPr>
+          <a:xfrm>
+            <a:off x="6160854" y="4467121"/>
+            <a:ext cx="1669047" cy="307777"/>
+          </a:xfrm>
+          <a:prstGeom prst="rect">
+            <a:avLst/>
+          </a:prstGeom>
+          <a:noFill/>
+        </p:spPr>
+        <p:txBody>
+          <a:bodyPr wrap="none" rtlCol="0">
+            <a:spAutoFit/>
+          </a:bodyPr>
+          <a:lstStyle/>
+          <a:p>
+            <a:r>
+              <a:rPr lang="en-US" altLang="zh-CN" sz="1400">
+                <a:latin typeface="Cambria" panose="02040503050406030204" pitchFamily="18" charset="0"/>
+                <a:ea typeface="Cambria" panose="02040503050406030204" pitchFamily="18" charset="0"/>
+              </a:rPr>
+              <a:t>Seed:42/123/2025</a:t>
+            </a:r>
+            <a:endParaRPr lang="zh-CN" altLang="en-US" sz="1400">
+              <a:latin typeface="Cambria" panose="02040503050406030204" pitchFamily="18" charset="0"/>
+            </a:endParaRPr>
+          </a:p>
+        </p:txBody>
+      </p:sp>
     </p:spTree>
     <p:extLst>
       <p:ext uri="{BB962C8B-B14F-4D97-AF65-F5344CB8AC3E}">
         <p14:creationId xmlns:p14="http://schemas.microsoft.com/office/powerpoint/2010/main" val="3452712369"/>
+      </p:ext>
+    </p:extLst>
+  </p:cSld>
+  <p:clrMapOvr>
+    <a:masterClrMapping/>
+  </p:clrMapOvr>
+</p:sld>
+</file>
+
+<file path=ppt/slides/slide2.xml><?xml version="1.0" encoding="utf-8"?>
+<p:sld xmlns:a="http://schemas.openxmlformats.org/drawingml/2006/main" xmlns:r="http://schemas.openxmlformats.org/officeDocument/2006/relationships" xmlns:p="http://schemas.openxmlformats.org/presentationml/2006/main">
+  <p:cSld>
+    <p:spTree>
+      <p:nvGrpSpPr>
+        <p:cNvPr id="1" name=""/>
+        <p:cNvGrpSpPr/>
+        <p:nvPr/>
+      </p:nvGrpSpPr>
+      <p:grpSpPr>
+        <a:xfrm>
+          <a:off x="0" y="0"/>
+          <a:ext cx="0" cy="0"/>
+          <a:chOff x="0" y="0"/>
+          <a:chExt cx="0" cy="0"/>
+        </a:xfrm>
+      </p:grpSpPr>
+      <p:grpSp>
+        <p:nvGrpSpPr>
+          <p:cNvPr id="8" name="组合 7">
+            <a:extLst>
+              <a:ext uri="{FF2B5EF4-FFF2-40B4-BE49-F238E27FC236}">
+                <a16:creationId xmlns:a16="http://schemas.microsoft.com/office/drawing/2014/main" id="{8FEAD71C-1C98-D624-BD24-621E1D25E704}"/>
+              </a:ext>
+            </a:extLst>
+          </p:cNvPr>
+          <p:cNvGrpSpPr/>
+          <p:nvPr/>
+        </p:nvGrpSpPr>
+        <p:grpSpPr>
+          <a:xfrm>
+            <a:off x="1111142" y="907036"/>
+            <a:ext cx="9869737" cy="2521964"/>
+            <a:chOff x="1111142" y="907036"/>
+            <a:chExt cx="9869737" cy="2521964"/>
+          </a:xfrm>
+        </p:grpSpPr>
+        <p:sp>
+          <p:nvSpPr>
+            <p:cNvPr id="7" name="矩形: 圆角 6">
+              <a:extLst>
+                <a:ext uri="{FF2B5EF4-FFF2-40B4-BE49-F238E27FC236}">
+                  <a16:creationId xmlns:a16="http://schemas.microsoft.com/office/drawing/2014/main" id="{41AE0792-753A-AF14-B296-43A1BADF90D9}"/>
+                </a:ext>
+              </a:extLst>
+            </p:cNvPr>
+            <p:cNvSpPr/>
+            <p:nvPr/>
+          </p:nvSpPr>
+          <p:spPr>
+            <a:xfrm>
+              <a:off x="1161630" y="951914"/>
+              <a:ext cx="9819249" cy="2477086"/>
+            </a:xfrm>
+            <a:prstGeom prst="roundRect">
+              <a:avLst/>
+            </a:prstGeom>
+            <a:gradFill flip="none" rotWithShape="1">
+              <a:gsLst>
+                <a:gs pos="0">
+                  <a:schemeClr val="accent2">
+                    <a:lumMod val="5000"/>
+                    <a:lumOff val="95000"/>
+                  </a:schemeClr>
+                </a:gs>
+                <a:gs pos="70000">
+                  <a:schemeClr val="accent2">
+                    <a:lumMod val="45000"/>
+                    <a:lumOff val="55000"/>
+                  </a:schemeClr>
+                </a:gs>
+                <a:gs pos="86000">
+                  <a:schemeClr val="accent2">
+                    <a:lumMod val="45000"/>
+                    <a:lumOff val="55000"/>
+                  </a:schemeClr>
+                </a:gs>
+                <a:gs pos="100000">
+                  <a:schemeClr val="accent2">
+                    <a:lumMod val="60000"/>
+                    <a:lumOff val="40000"/>
+                  </a:schemeClr>
+                </a:gs>
+              </a:gsLst>
+              <a:lin ang="10800000" scaled="1"/>
+              <a:tileRect/>
+            </a:gradFill>
+            <a:ln>
+              <a:noFill/>
+            </a:ln>
+            <a:effectLst>
+              <a:outerShdw blurRad="50800" dist="50800" dir="5400000" algn="ctr" rotWithShape="0">
+                <a:srgbClr val="000000"/>
+              </a:outerShdw>
+              <a:softEdge rad="0"/>
+            </a:effectLst>
+          </p:spPr>
+          <p:style>
+            <a:lnRef idx="2">
+              <a:schemeClr val="accent1">
+                <a:shade val="15000"/>
+              </a:schemeClr>
+            </a:lnRef>
+            <a:fillRef idx="1">
+              <a:schemeClr val="accent1"/>
+            </a:fillRef>
+            <a:effectRef idx="0">
+              <a:schemeClr val="accent1"/>
+            </a:effectRef>
+            <a:fontRef idx="minor">
+              <a:schemeClr val="lt1"/>
+            </a:fontRef>
+          </p:style>
+          <p:txBody>
+            <a:bodyPr rtlCol="0" anchor="ctr"/>
+            <a:lstStyle/>
+            <a:p>
+              <a:pPr algn="ctr"/>
+              <a:endParaRPr lang="zh-CN" altLang="en-US"/>
+            </a:p>
+          </p:txBody>
+        </p:sp>
+        <p:sp>
+          <p:nvSpPr>
+            <p:cNvPr id="6" name="任意多边形: 形状 5">
+              <a:extLst>
+                <a:ext uri="{FF2B5EF4-FFF2-40B4-BE49-F238E27FC236}">
+                  <a16:creationId xmlns:a16="http://schemas.microsoft.com/office/drawing/2014/main" id="{638D1FCA-C869-0586-6002-D57A7FDBF1CC}"/>
+                </a:ext>
+              </a:extLst>
+            </p:cNvPr>
+            <p:cNvSpPr/>
+            <p:nvPr/>
+          </p:nvSpPr>
+          <p:spPr>
+            <a:xfrm>
+              <a:off x="1111142" y="907036"/>
+              <a:ext cx="3579183" cy="445477"/>
+            </a:xfrm>
+            <a:custGeom>
+              <a:avLst/>
+              <a:gdLst>
+                <a:gd name="connsiteX0" fmla="*/ 442878 w 3579183"/>
+                <a:gd name="connsiteY0" fmla="*/ 0 h 412652"/>
+                <a:gd name="connsiteX1" fmla="*/ 3579183 w 3579183"/>
+                <a:gd name="connsiteY1" fmla="*/ 0 h 412652"/>
+                <a:gd name="connsiteX2" fmla="*/ 3476020 w 3579183"/>
+                <a:gd name="connsiteY2" fmla="*/ 412652 h 412652"/>
+                <a:gd name="connsiteX3" fmla="*/ 0 w 3579183"/>
+                <a:gd name="connsiteY3" fmla="*/ 412652 h 412652"/>
+                <a:gd name="connsiteX4" fmla="*/ 5678 w 3579183"/>
+                <a:gd name="connsiteY4" fmla="*/ 356329 h 412652"/>
+                <a:gd name="connsiteX5" fmla="*/ 442878 w 3579183"/>
+                <a:gd name="connsiteY5" fmla="*/ 0 h 412652"/>
+              </a:gdLst>
+              <a:ahLst/>
+              <a:cxnLst>
+                <a:cxn ang="0">
+                  <a:pos x="connsiteX0" y="connsiteY0"/>
+                </a:cxn>
+                <a:cxn ang="0">
+                  <a:pos x="connsiteX1" y="connsiteY1"/>
+                </a:cxn>
+                <a:cxn ang="0">
+                  <a:pos x="connsiteX2" y="connsiteY2"/>
+                </a:cxn>
+                <a:cxn ang="0">
+                  <a:pos x="connsiteX3" y="connsiteY3"/>
+                </a:cxn>
+                <a:cxn ang="0">
+                  <a:pos x="connsiteX4" y="connsiteY4"/>
+                </a:cxn>
+                <a:cxn ang="0">
+                  <a:pos x="connsiteX5" y="connsiteY5"/>
+                </a:cxn>
+              </a:cxnLst>
+              <a:rect l="l" t="t" r="r" b="b"/>
+              <a:pathLst>
+                <a:path w="3579183" h="412652">
+                  <a:moveTo>
+                    <a:pt x="442878" y="0"/>
+                  </a:moveTo>
+                  <a:lnTo>
+                    <a:pt x="3579183" y="0"/>
+                  </a:lnTo>
+                  <a:lnTo>
+                    <a:pt x="3476020" y="412652"/>
+                  </a:lnTo>
+                  <a:lnTo>
+                    <a:pt x="0" y="412652"/>
+                  </a:lnTo>
+                  <a:lnTo>
+                    <a:pt x="5678" y="356329"/>
+                  </a:lnTo>
+                  <a:cubicBezTo>
+                    <a:pt x="47291" y="152973"/>
+                    <a:pt x="227220" y="0"/>
+                    <a:pt x="442878" y="0"/>
+                  </a:cubicBezTo>
+                  <a:close/>
+                </a:path>
+              </a:pathLst>
+            </a:custGeom>
+            <a:solidFill>
+              <a:schemeClr val="accent2">
+                <a:lumMod val="75000"/>
+              </a:schemeClr>
+            </a:solidFill>
+            <a:ln>
+              <a:noFill/>
+            </a:ln>
+            <a:effectLst>
+              <a:outerShdw blurRad="50800" dist="38100" dir="2700000" algn="tl" rotWithShape="0">
+                <a:prstClr val="black">
+                  <a:alpha val="40000"/>
+                </a:prstClr>
+              </a:outerShdw>
+            </a:effectLst>
+          </p:spPr>
+          <p:style>
+            <a:lnRef idx="2">
+              <a:schemeClr val="accent1">
+                <a:shade val="15000"/>
+              </a:schemeClr>
+            </a:lnRef>
+            <a:fillRef idx="1">
+              <a:schemeClr val="accent1"/>
+            </a:fillRef>
+            <a:effectRef idx="0">
+              <a:schemeClr val="accent1"/>
+            </a:effectRef>
+            <a:fontRef idx="minor">
+              <a:schemeClr val="lt1"/>
+            </a:fontRef>
+          </p:style>
+          <p:txBody>
+            <a:bodyPr wrap="square" rtlCol="0" anchor="ctr">
+              <a:noAutofit/>
+            </a:bodyPr>
+            <a:lstStyle/>
+            <a:p>
+              <a:pPr algn="ctr"/>
+              <a:endParaRPr lang="zh-CN" altLang="en-US"/>
+            </a:p>
+          </p:txBody>
+        </p:sp>
+      </p:grpSp>
+    </p:spTree>
+    <p:extLst>
+      <p:ext uri="{BB962C8B-B14F-4D97-AF65-F5344CB8AC3E}">
+        <p14:creationId xmlns:p14="http://schemas.microsoft.com/office/powerpoint/2010/main" val="3010656321"/>
       </p:ext>
     </p:extLst>
   </p:cSld>

--- a/架构图.pptx
+++ b/架构图.pptx
@@ -260,7 +260,7 @@
           <a:p>
             <a:fld id="{D6C62C4D-D056-4B4F-8CEF-42E495CFF63F}" type="datetimeFigureOut">
               <a:rPr lang="zh-CN" altLang="en-US" smtClean="0"/>
-              <a:t>2026/8/9</a:t>
+              <a:t>2026/8/12</a:t>
             </a:fld>
             <a:endParaRPr lang="zh-CN" altLang="en-US"/>
           </a:p>
@@ -458,7 +458,7 @@
           <a:p>
             <a:fld id="{D6C62C4D-D056-4B4F-8CEF-42E495CFF63F}" type="datetimeFigureOut">
               <a:rPr lang="zh-CN" altLang="en-US" smtClean="0"/>
-              <a:t>2026/8/9</a:t>
+              <a:t>2026/8/12</a:t>
             </a:fld>
             <a:endParaRPr lang="zh-CN" altLang="en-US"/>
           </a:p>
@@ -666,7 +666,7 @@
           <a:p>
             <a:fld id="{D6C62C4D-D056-4B4F-8CEF-42E495CFF63F}" type="datetimeFigureOut">
               <a:rPr lang="zh-CN" altLang="en-US" smtClean="0"/>
-              <a:t>2026/8/9</a:t>
+              <a:t>2026/8/12</a:t>
             </a:fld>
             <a:endParaRPr lang="zh-CN" altLang="en-US"/>
           </a:p>
@@ -864,7 +864,7 @@
           <a:p>
             <a:fld id="{D6C62C4D-D056-4B4F-8CEF-42E495CFF63F}" type="datetimeFigureOut">
               <a:rPr lang="zh-CN" altLang="en-US" smtClean="0"/>
-              <a:t>2026/8/9</a:t>
+              <a:t>2026/8/12</a:t>
             </a:fld>
             <a:endParaRPr lang="zh-CN" altLang="en-US"/>
           </a:p>
@@ -1139,7 +1139,7 @@
           <a:p>
             <a:fld id="{D6C62C4D-D056-4B4F-8CEF-42E495CFF63F}" type="datetimeFigureOut">
               <a:rPr lang="zh-CN" altLang="en-US" smtClean="0"/>
-              <a:t>2026/8/9</a:t>
+              <a:t>2026/8/12</a:t>
             </a:fld>
             <a:endParaRPr lang="zh-CN" altLang="en-US"/>
           </a:p>
@@ -1404,7 +1404,7 @@
           <a:p>
             <a:fld id="{D6C62C4D-D056-4B4F-8CEF-42E495CFF63F}" type="datetimeFigureOut">
               <a:rPr lang="zh-CN" altLang="en-US" smtClean="0"/>
-              <a:t>2026/8/9</a:t>
+              <a:t>2026/8/12</a:t>
             </a:fld>
             <a:endParaRPr lang="zh-CN" altLang="en-US"/>
           </a:p>
@@ -1816,7 +1816,7 @@
           <a:p>
             <a:fld id="{D6C62C4D-D056-4B4F-8CEF-42E495CFF63F}" type="datetimeFigureOut">
               <a:rPr lang="zh-CN" altLang="en-US" smtClean="0"/>
-              <a:t>2026/8/9</a:t>
+              <a:t>2026/8/12</a:t>
             </a:fld>
             <a:endParaRPr lang="zh-CN" altLang="en-US"/>
           </a:p>
@@ -1957,7 +1957,7 @@
           <a:p>
             <a:fld id="{D6C62C4D-D056-4B4F-8CEF-42E495CFF63F}" type="datetimeFigureOut">
               <a:rPr lang="zh-CN" altLang="en-US" smtClean="0"/>
-              <a:t>2026/8/9</a:t>
+              <a:t>2026/8/12</a:t>
             </a:fld>
             <a:endParaRPr lang="zh-CN" altLang="en-US"/>
           </a:p>
@@ -2070,7 +2070,7 @@
           <a:p>
             <a:fld id="{D6C62C4D-D056-4B4F-8CEF-42E495CFF63F}" type="datetimeFigureOut">
               <a:rPr lang="zh-CN" altLang="en-US" smtClean="0"/>
-              <a:t>2026/8/9</a:t>
+              <a:t>2026/8/12</a:t>
             </a:fld>
             <a:endParaRPr lang="zh-CN" altLang="en-US"/>
           </a:p>
@@ -2381,7 +2381,7 @@
           <a:p>
             <a:fld id="{D6C62C4D-D056-4B4F-8CEF-42E495CFF63F}" type="datetimeFigureOut">
               <a:rPr lang="zh-CN" altLang="en-US" smtClean="0"/>
-              <a:t>2026/8/9</a:t>
+              <a:t>2026/8/12</a:t>
             </a:fld>
             <a:endParaRPr lang="zh-CN" altLang="en-US"/>
           </a:p>
@@ -2669,7 +2669,7 @@
           <a:p>
             <a:fld id="{D6C62C4D-D056-4B4F-8CEF-42E495CFF63F}" type="datetimeFigureOut">
               <a:rPr lang="zh-CN" altLang="en-US" smtClean="0"/>
-              <a:t>2026/8/9</a:t>
+              <a:t>2026/8/12</a:t>
             </a:fld>
             <a:endParaRPr lang="zh-CN" altLang="en-US"/>
           </a:p>
@@ -2910,7 +2910,7 @@
           <a:p>
             <a:fld id="{D6C62C4D-D056-4B4F-8CEF-42E495CFF63F}" type="datetimeFigureOut">
               <a:rPr lang="zh-CN" altLang="en-US" smtClean="0"/>
-              <a:t>2026/8/9</a:t>
+              <a:t>2026/8/12</a:t>
             </a:fld>
             <a:endParaRPr lang="zh-CN" altLang="en-US"/>
           </a:p>
@@ -3341,8 +3341,8 @@
         </p:nvSpPr>
         <p:spPr>
           <a:xfrm>
-            <a:off x="441647" y="1173406"/>
-            <a:ext cx="11438414" cy="4802003"/>
+            <a:off x="470270" y="1203539"/>
+            <a:ext cx="11438414" cy="5105474"/>
           </a:xfrm>
           <a:prstGeom prst="roundRect">
             <a:avLst/>
@@ -3416,10 +3416,10 @@
         </p:nvGrpSpPr>
         <p:grpSpPr>
           <a:xfrm>
-            <a:off x="1608705" y="3596906"/>
-            <a:ext cx="6645277" cy="1838913"/>
-            <a:chOff x="1130486" y="932793"/>
-            <a:chExt cx="9850393" cy="2496207"/>
+            <a:off x="1584232" y="3718454"/>
+            <a:ext cx="6631251" cy="2388681"/>
+            <a:chOff x="1130486" y="932794"/>
+            <a:chExt cx="9829602" cy="2495891"/>
           </a:xfrm>
         </p:grpSpPr>
         <p:sp>
@@ -3436,8 +3436,8 @@
           </p:nvSpPr>
           <p:spPr>
             <a:xfrm>
-              <a:off x="1161630" y="951914"/>
-              <a:ext cx="9819249" cy="2477086"/>
+              <a:off x="1140838" y="951599"/>
+              <a:ext cx="9819250" cy="2477086"/>
             </a:xfrm>
             <a:prstGeom prst="roundRect">
               <a:avLst/>
@@ -3521,8 +3521,8 @@
           </p:nvSpPr>
           <p:spPr>
             <a:xfrm>
-              <a:off x="1130486" y="932793"/>
-              <a:ext cx="3579183" cy="445476"/>
+              <a:off x="1130486" y="932794"/>
+              <a:ext cx="3579183" cy="331888"/>
             </a:xfrm>
             <a:custGeom>
               <a:avLst/>
@@ -3683,6 +3683,71 @@
           </p:txBody>
         </p:sp>
       </p:grpSp>
+      <p:sp>
+        <p:nvSpPr>
+          <p:cNvPr id="43" name="矩形: 圆角 42">
+            <a:extLst>
+              <a:ext uri="{FF2B5EF4-FFF2-40B4-BE49-F238E27FC236}">
+                <a16:creationId xmlns:a16="http://schemas.microsoft.com/office/drawing/2014/main" id="{8C8CE9B7-ACC1-EA02-5A65-CC03AD585B40}"/>
+              </a:ext>
+            </a:extLst>
+          </p:cNvPr>
+          <p:cNvSpPr/>
+          <p:nvPr/>
+        </p:nvSpPr>
+        <p:spPr>
+          <a:xfrm>
+            <a:off x="3553268" y="4052264"/>
+            <a:ext cx="2168409" cy="1767072"/>
+          </a:xfrm>
+          <a:prstGeom prst="roundRect">
+            <a:avLst>
+              <a:gd name="adj" fmla="val 9087"/>
+            </a:avLst>
+          </a:prstGeom>
+          <a:solidFill>
+            <a:schemeClr val="accent2"/>
+          </a:solidFill>
+          <a:ln>
+            <a:noFill/>
+          </a:ln>
+          <a:effectLst>
+            <a:outerShdw blurRad="50800" dist="38100" dir="2700000" algn="tl" rotWithShape="0">
+              <a:prstClr val="black">
+                <a:alpha val="40000"/>
+              </a:prstClr>
+            </a:outerShdw>
+          </a:effectLst>
+        </p:spPr>
+        <p:style>
+          <a:lnRef idx="2">
+            <a:schemeClr val="accent1">
+              <a:shade val="15000"/>
+            </a:schemeClr>
+          </a:lnRef>
+          <a:fillRef idx="1">
+            <a:schemeClr val="accent1"/>
+          </a:fillRef>
+          <a:effectRef idx="0">
+            <a:schemeClr val="accent1"/>
+          </a:effectRef>
+          <a:fontRef idx="minor">
+            <a:schemeClr val="lt1"/>
+          </a:fontRef>
+        </p:style>
+        <p:txBody>
+          <a:bodyPr rtlCol="0" anchor="ctr"/>
+          <a:lstStyle/>
+          <a:p>
+            <a:endParaRPr lang="zh-CN" altLang="en-US" sz="1400" dirty="0">
+              <a:solidFill>
+                <a:schemeClr val="tx1"/>
+              </a:solidFill>
+              <a:latin typeface="Cambria" panose="02040503050406030204" pitchFamily="18" charset="0"/>
+            </a:endParaRPr>
+          </a:p>
+        </p:txBody>
+      </p:sp>
       <p:grpSp>
         <p:nvGrpSpPr>
           <p:cNvPr id="7" name="组合 6">
@@ -3697,8 +3762,8 @@
         </p:nvGrpSpPr>
         <p:grpSpPr>
           <a:xfrm>
-            <a:off x="1596774" y="1570346"/>
-            <a:ext cx="6657208" cy="1852201"/>
+            <a:off x="1596774" y="1337367"/>
+            <a:ext cx="6657208" cy="2286089"/>
             <a:chOff x="1161630" y="951914"/>
             <a:chExt cx="9868740" cy="2494985"/>
           </a:xfrm>
@@ -3850,7 +3915,7 @@
           <p:spPr>
             <a:xfrm>
               <a:off x="1161630" y="951914"/>
-              <a:ext cx="3579183" cy="445477"/>
+              <a:ext cx="3579182" cy="375788"/>
             </a:xfrm>
             <a:custGeom>
               <a:avLst/>
@@ -4006,10 +4071,10 @@
       </p:grpSp>
       <p:pic>
         <p:nvPicPr>
-          <p:cNvPr id="18" name="图片 17">
-            <a:extLst>
-              <a:ext uri="{FF2B5EF4-FFF2-40B4-BE49-F238E27FC236}">
-                <a16:creationId xmlns:a16="http://schemas.microsoft.com/office/drawing/2014/main" id="{4150ABE2-3CEA-EADD-127E-1550D256B20D}"/>
+          <p:cNvPr id="48" name="图片 47">
+            <a:extLst>
+              <a:ext uri="{FF2B5EF4-FFF2-40B4-BE49-F238E27FC236}">
+                <a16:creationId xmlns:a16="http://schemas.microsoft.com/office/drawing/2014/main" id="{3A27AD29-F05E-5D1A-5F1B-59A4D2B908A1}"/>
               </a:ext>
             </a:extLst>
           </p:cNvPr>
@@ -4020,6 +4085,42 @@
         </p:nvPicPr>
         <p:blipFill>
           <a:blip r:embed="rId2">
+            <a:extLst>
+              <a:ext uri="{28A0092B-C50C-407E-A947-70E740481C1C}">
+                <a14:useLocalDpi xmlns:a14="http://schemas.microsoft.com/office/drawing/2010/main" val="0"/>
+              </a:ext>
+            </a:extLst>
+          </a:blip>
+          <a:stretch>
+            <a:fillRect/>
+          </a:stretch>
+        </p:blipFill>
+        <p:spPr>
+          <a:xfrm>
+            <a:off x="3459026" y="3875063"/>
+            <a:ext cx="2262652" cy="2449545"/>
+          </a:xfrm>
+          <a:prstGeom prst="rect">
+            <a:avLst/>
+          </a:prstGeom>
+        </p:spPr>
+      </p:pic>
+      <p:pic>
+        <p:nvPicPr>
+          <p:cNvPr id="18" name="图片 17">
+            <a:extLst>
+              <a:ext uri="{FF2B5EF4-FFF2-40B4-BE49-F238E27FC236}">
+                <a16:creationId xmlns:a16="http://schemas.microsoft.com/office/drawing/2014/main" id="{4150ABE2-3CEA-EADD-127E-1550D256B20D}"/>
+              </a:ext>
+            </a:extLst>
+          </p:cNvPr>
+          <p:cNvPicPr>
+            <a:picLocks noChangeAspect="1"/>
+          </p:cNvPicPr>
+          <p:nvPr/>
+        </p:nvPicPr>
+        <p:blipFill>
+          <a:blip r:embed="rId3">
             <a:extLst>
               <a:ext uri="{28A0092B-C50C-407E-A947-70E740481C1C}">
                 <a14:useLocalDpi xmlns:a14="http://schemas.microsoft.com/office/drawing/2010/main" val="0"/>
@@ -4054,8 +4155,8 @@
         </p:nvSpPr>
         <p:spPr>
           <a:xfrm>
-            <a:off x="847135" y="2430266"/>
-            <a:ext cx="480108" cy="1987484"/>
+            <a:off x="819254" y="2697814"/>
+            <a:ext cx="480108" cy="1981451"/>
           </a:xfrm>
           <a:prstGeom prst="roundRect">
             <a:avLst/>
@@ -4116,7 +4217,7 @@
         <p:spPr>
           <a:xfrm>
             <a:off x="5896681" y="1667580"/>
-            <a:ext cx="1295187" cy="1577749"/>
+            <a:ext cx="1991727" cy="1369180"/>
           </a:xfrm>
           <a:prstGeom prst="roundRect">
             <a:avLst/>
@@ -4200,7 +4301,7 @@
         </p:nvSpPr>
         <p:spPr>
           <a:xfrm>
-            <a:off x="976480" y="2574670"/>
+            <a:off x="967000" y="2906939"/>
             <a:ext cx="202976" cy="210810"/>
           </a:xfrm>
           <a:prstGeom prst="ellipse">
@@ -4267,7 +4368,7 @@
         </p:nvSpPr>
         <p:spPr>
           <a:xfrm>
-            <a:off x="976480" y="2781754"/>
+            <a:off x="967000" y="3114023"/>
             <a:ext cx="202976" cy="210810"/>
           </a:xfrm>
           <a:prstGeom prst="ellipse">
@@ -4333,7 +4434,7 @@
         </p:nvSpPr>
         <p:spPr>
           <a:xfrm>
-            <a:off x="976482" y="2991592"/>
+            <a:off x="967002" y="3323861"/>
             <a:ext cx="202976" cy="210810"/>
           </a:xfrm>
           <a:prstGeom prst="ellipse">
@@ -4400,7 +4501,7 @@
         </p:nvSpPr>
         <p:spPr>
           <a:xfrm>
-            <a:off x="847135" y="3224262"/>
+            <a:off x="851982" y="3577598"/>
             <a:ext cx="461665" cy="828187"/>
           </a:xfrm>
           <a:prstGeom prst="rect">
@@ -4436,7 +4537,7 @@
         </p:nvSpPr>
         <p:spPr>
           <a:xfrm>
-            <a:off x="976482" y="3629326"/>
+            <a:off x="967002" y="3961595"/>
             <a:ext cx="202976" cy="210810"/>
           </a:xfrm>
           <a:prstGeom prst="ellipse">
@@ -4502,7 +4603,7 @@
         </p:nvSpPr>
         <p:spPr>
           <a:xfrm>
-            <a:off x="976480" y="3845440"/>
+            <a:off x="967000" y="4177709"/>
             <a:ext cx="202976" cy="210810"/>
           </a:xfrm>
           <a:prstGeom prst="ellipse">
@@ -4569,7 +4670,7 @@
         </p:nvSpPr>
         <p:spPr>
           <a:xfrm>
-            <a:off x="976480" y="4056250"/>
+            <a:off x="967000" y="4388519"/>
             <a:ext cx="202976" cy="210810"/>
           </a:xfrm>
           <a:prstGeom prst="ellipse">
@@ -4636,7 +4737,7 @@
         </p:nvSpPr>
         <p:spPr>
           <a:xfrm>
-            <a:off x="747453" y="4369651"/>
+            <a:off x="1048393" y="3534652"/>
             <a:ext cx="724878" cy="307777"/>
           </a:xfrm>
           <a:prstGeom prst="rect">
@@ -4664,89 +4765,6 @@
           </a:p>
         </p:txBody>
       </p:sp>
-      <p:cxnSp>
-        <p:nvCxnSpPr>
-          <p:cNvPr id="16" name="直接箭头连接符 15">
-            <a:extLst>
-              <a:ext uri="{FF2B5EF4-FFF2-40B4-BE49-F238E27FC236}">
-                <a16:creationId xmlns:a16="http://schemas.microsoft.com/office/drawing/2014/main" id="{02472380-EF01-D659-62B7-A2E65B41FD66}"/>
-              </a:ext>
-            </a:extLst>
-          </p:cNvPr>
-          <p:cNvCxnSpPr>
-            <a:cxnSpLocks/>
-          </p:cNvCxnSpPr>
-          <p:nvPr/>
-        </p:nvCxnSpPr>
-        <p:spPr>
-          <a:xfrm>
-            <a:off x="1360561" y="2615374"/>
-            <a:ext cx="583330" cy="0"/>
-          </a:xfrm>
-          <a:prstGeom prst="straightConnector1">
-            <a:avLst/>
-          </a:prstGeom>
-          <a:ln>
-            <a:tailEnd type="triangle"/>
-          </a:ln>
-        </p:spPr>
-        <p:style>
-          <a:lnRef idx="2">
-            <a:schemeClr val="accent1"/>
-          </a:lnRef>
-          <a:fillRef idx="0">
-            <a:schemeClr val="accent1"/>
-          </a:fillRef>
-          <a:effectRef idx="1">
-            <a:schemeClr val="accent1"/>
-          </a:effectRef>
-          <a:fontRef idx="minor">
-            <a:schemeClr val="tx1"/>
-          </a:fontRef>
-        </p:style>
-      </p:cxnSp>
-      <p:cxnSp>
-        <p:nvCxnSpPr>
-          <p:cNvPr id="22" name="直接箭头连接符 21">
-            <a:extLst>
-              <a:ext uri="{FF2B5EF4-FFF2-40B4-BE49-F238E27FC236}">
-                <a16:creationId xmlns:a16="http://schemas.microsoft.com/office/drawing/2014/main" id="{39856EDB-A5F4-0DA9-4E11-1CB4E4A2DDAE}"/>
-              </a:ext>
-            </a:extLst>
-          </p:cNvPr>
-          <p:cNvCxnSpPr>
-            <a:cxnSpLocks/>
-            <a:endCxn id="39" idx="1"/>
-          </p:cNvCxnSpPr>
-          <p:nvPr/>
-        </p:nvCxnSpPr>
-        <p:spPr>
-          <a:xfrm>
-            <a:off x="1439144" y="4417448"/>
-            <a:ext cx="439381" cy="302"/>
-          </a:xfrm>
-          <a:prstGeom prst="straightConnector1">
-            <a:avLst/>
-          </a:prstGeom>
-          <a:ln>
-            <a:tailEnd type="triangle"/>
-          </a:ln>
-        </p:spPr>
-        <p:style>
-          <a:lnRef idx="2">
-            <a:schemeClr val="accent1"/>
-          </a:lnRef>
-          <a:fillRef idx="0">
-            <a:schemeClr val="accent1"/>
-          </a:fillRef>
-          <a:effectRef idx="1">
-            <a:schemeClr val="accent1"/>
-          </a:effectRef>
-          <a:fontRef idx="minor">
-            <a:schemeClr val="tx1"/>
-          </a:fontRef>
-        </p:style>
-      </p:cxnSp>
       <p:grpSp>
         <p:nvGrpSpPr>
           <p:cNvPr id="26" name="组合 25">
@@ -5067,8 +5085,8 @@
         </p:nvSpPr>
         <p:spPr>
           <a:xfrm>
-            <a:off x="1878525" y="4166144"/>
-            <a:ext cx="1270674" cy="503212"/>
+            <a:off x="1875592" y="4091763"/>
+            <a:ext cx="1375294" cy="1719354"/>
           </a:xfrm>
           <a:prstGeom prst="roundRect">
             <a:avLst/>
@@ -5111,16 +5129,6 @@
           <a:lstStyle/>
           <a:p>
             <a:pPr algn="ctr"/>
-            <a:r>
-              <a:rPr lang="en-US" altLang="zh-CN" sz="1400" dirty="0">
-                <a:solidFill>
-                  <a:schemeClr val="tx1"/>
-                </a:solidFill>
-                <a:latin typeface="Cambria" panose="02040503050406030204" pitchFamily="18" charset="0"/>
-                <a:ea typeface="Cambria" panose="02040503050406030204" pitchFamily="18" charset="0"/>
-              </a:rPr>
-              <a:t>ProT5+LoRA</a:t>
-            </a:r>
             <a:endParaRPr lang="zh-CN" altLang="en-US" sz="1400" dirty="0">
               <a:solidFill>
                 <a:schemeClr val="tx1"/>
@@ -5142,14 +5150,13 @@
           <p:cNvCxnSpPr>
             <a:cxnSpLocks/>
             <a:stCxn id="39" idx="3"/>
-            <a:endCxn id="43" idx="1"/>
           </p:cNvCxnSpPr>
           <p:nvPr/>
         </p:nvCxnSpPr>
         <p:spPr>
           <a:xfrm>
-            <a:off x="3149199" y="4417750"/>
-            <a:ext cx="435571" cy="5906"/>
+            <a:off x="3250886" y="4951440"/>
+            <a:ext cx="299449" cy="0"/>
           </a:xfrm>
           <a:prstGeom prst="straightConnector1">
             <a:avLst/>
@@ -5173,94 +5180,6 @@
           </a:fontRef>
         </p:style>
       </p:cxnSp>
-      <p:sp>
-        <p:nvSpPr>
-          <p:cNvPr id="43" name="矩形: 圆角 42">
-            <a:extLst>
-              <a:ext uri="{FF2B5EF4-FFF2-40B4-BE49-F238E27FC236}">
-                <a16:creationId xmlns:a16="http://schemas.microsoft.com/office/drawing/2014/main" id="{8C8CE9B7-ACC1-EA02-5A65-CC03AD585B40}"/>
-              </a:ext>
-            </a:extLst>
-          </p:cNvPr>
-          <p:cNvSpPr/>
-          <p:nvPr/>
-        </p:nvSpPr>
-        <p:spPr>
-          <a:xfrm>
-            <a:off x="3584770" y="4106562"/>
-            <a:ext cx="1822426" cy="634188"/>
-          </a:xfrm>
-          <a:prstGeom prst="roundRect">
-            <a:avLst/>
-          </a:prstGeom>
-          <a:solidFill>
-            <a:schemeClr val="accent2"/>
-          </a:solidFill>
-          <a:ln>
-            <a:noFill/>
-          </a:ln>
-          <a:effectLst>
-            <a:outerShdw blurRad="50800" dist="38100" dir="2700000" algn="tl" rotWithShape="0">
-              <a:prstClr val="black">
-                <a:alpha val="40000"/>
-              </a:prstClr>
-            </a:outerShdw>
-          </a:effectLst>
-        </p:spPr>
-        <p:style>
-          <a:lnRef idx="2">
-            <a:schemeClr val="accent1">
-              <a:shade val="15000"/>
-            </a:schemeClr>
-          </a:lnRef>
-          <a:fillRef idx="1">
-            <a:schemeClr val="accent1"/>
-          </a:fillRef>
-          <a:effectRef idx="0">
-            <a:schemeClr val="accent1"/>
-          </a:effectRef>
-          <a:fontRef idx="minor">
-            <a:schemeClr val="lt1"/>
-          </a:fontRef>
-        </p:style>
-        <p:txBody>
-          <a:bodyPr rtlCol="0" anchor="ctr"/>
-          <a:lstStyle/>
-          <a:p>
-            <a:pPr algn="ctr"/>
-            <a:r>
-              <a:rPr lang="en-US" altLang="zh-CN" sz="1400">
-                <a:solidFill>
-                  <a:schemeClr val="tx1"/>
-                </a:solidFill>
-                <a:latin typeface="Cambria" panose="02040503050406030204" pitchFamily="18" charset="0"/>
-                <a:ea typeface="Cambria" panose="02040503050406030204" pitchFamily="18" charset="0"/>
-              </a:rPr>
-              <a:t>Bidirectional</a:t>
-            </a:r>
-            <a:r>
-              <a:rPr lang="en-US" altLang="zh-CN" sz="1600"/>
-              <a:t> </a:t>
-            </a:r>
-            <a:r>
-              <a:rPr lang="en-US" altLang="zh-CN" sz="1400">
-                <a:solidFill>
-                  <a:schemeClr val="tx1"/>
-                </a:solidFill>
-                <a:latin typeface="Cambria" panose="02040503050406030204" pitchFamily="18" charset="0"/>
-                <a:ea typeface="Cambria" panose="02040503050406030204" pitchFamily="18" charset="0"/>
-              </a:rPr>
-              <a:t>Mamba</a:t>
-            </a:r>
-            <a:endParaRPr lang="zh-CN" altLang="en-US" sz="1400" dirty="0">
-              <a:solidFill>
-                <a:schemeClr val="tx1"/>
-              </a:solidFill>
-              <a:latin typeface="Cambria" panose="02040503050406030204" pitchFamily="18" charset="0"/>
-            </a:endParaRPr>
-          </a:p>
-        </p:txBody>
-      </p:sp>
       <p:sp>
         <p:nvSpPr>
           <p:cNvPr id="45" name="椭圆 44">
@@ -5575,7 +5494,7 @@
         </p:nvSpPr>
         <p:spPr>
           <a:xfrm>
-            <a:off x="8378464" y="3087648"/>
+            <a:off x="8363531" y="3305604"/>
             <a:ext cx="1558290" cy="858253"/>
           </a:xfrm>
           <a:prstGeom prst="roundRect">
@@ -5649,8 +5568,8 @@
         </p:nvCxnSpPr>
         <p:spPr>
           <a:xfrm>
-            <a:off x="7191868" y="2456455"/>
-            <a:ext cx="1965741" cy="631193"/>
+            <a:off x="7888408" y="2352170"/>
+            <a:ext cx="1254268" cy="953434"/>
           </a:xfrm>
           <a:prstGeom prst="bentConnector2">
             <a:avLst/>
@@ -5688,7 +5607,7 @@
         </p:nvSpPr>
         <p:spPr>
           <a:xfrm>
-            <a:off x="10019006" y="3449091"/>
+            <a:off x="10019006" y="3672071"/>
             <a:ext cx="365760" cy="125317"/>
           </a:xfrm>
           <a:prstGeom prst="rightArrow">
@@ -5766,8 +5685,8 @@
         </p:nvSpPr>
         <p:spPr>
           <a:xfrm>
-            <a:off x="10481951" y="2831274"/>
-            <a:ext cx="966285" cy="1454976"/>
+            <a:off x="10481951" y="1704975"/>
+            <a:ext cx="966285" cy="4114361"/>
           </a:xfrm>
           <a:prstGeom prst="roundRect">
             <a:avLst/>
@@ -5864,8 +5783,8 @@
         </p:nvSpPr>
         <p:spPr>
           <a:xfrm>
-            <a:off x="5837579" y="3972548"/>
-            <a:ext cx="2218117" cy="889799"/>
+            <a:off x="6094227" y="4490900"/>
+            <a:ext cx="1748706" cy="889799"/>
           </a:xfrm>
           <a:prstGeom prst="roundRect">
             <a:avLst/>
@@ -5909,7 +5828,7 @@
           <a:p>
             <a:pPr algn="ctr"/>
             <a:r>
-              <a:rPr lang="en-US" altLang="zh-CN" sz="1400" dirty="0">
+              <a:rPr lang="en-US" altLang="zh-CN" sz="1400">
                 <a:solidFill>
                   <a:schemeClr val="tx1"/>
                 </a:solidFill>
@@ -5918,7 +5837,20 @@
               </a:rPr>
               <a:t>3-seed ensemble</a:t>
             </a:r>
-            <a:endParaRPr lang="zh-CN" altLang="en-US" sz="1400" dirty="0">
+          </a:p>
+          <a:p>
+            <a:pPr algn="ctr"/>
+            <a:r>
+              <a:rPr lang="en-US" altLang="zh-CN" sz="1400">
+                <a:solidFill>
+                  <a:schemeClr val="tx1"/>
+                </a:solidFill>
+                <a:latin typeface="Cambria" panose="02040503050406030204" pitchFamily="18" charset="0"/>
+                <a:ea typeface="Cambria" panose="02040503050406030204" pitchFamily="18" charset="0"/>
+              </a:rPr>
+              <a:t>Seed:42/123/2025</a:t>
+            </a:r>
+            <a:endParaRPr lang="zh-CN" altLang="en-US" sz="1400">
               <a:solidFill>
                 <a:schemeClr val="tx1"/>
               </a:solidFill>
@@ -5944,9 +5876,9 @@
           <p:nvPr/>
         </p:nvCxnSpPr>
         <p:spPr>
-          <a:xfrm flipV="1">
-            <a:off x="5407196" y="4417448"/>
-            <a:ext cx="430383" cy="6208"/>
+          <a:xfrm>
+            <a:off x="5721677" y="4935800"/>
+            <a:ext cx="372550" cy="0"/>
           </a:xfrm>
           <a:prstGeom prst="straightConnector1">
             <a:avLst/>
@@ -5988,8 +5920,8 @@
         </p:nvCxnSpPr>
         <p:spPr>
           <a:xfrm flipV="1">
-            <a:off x="8055696" y="3945901"/>
-            <a:ext cx="1101913" cy="471547"/>
+            <a:off x="7842933" y="4163857"/>
+            <a:ext cx="1299743" cy="771943"/>
           </a:xfrm>
           <a:prstGeom prst="bentConnector2">
             <a:avLst/>
@@ -6146,10 +6078,10 @@
       </p:cxnSp>
       <p:sp>
         <p:nvSpPr>
-          <p:cNvPr id="1038" name="文本框 1037">
-            <a:extLst>
-              <a:ext uri="{FF2B5EF4-FFF2-40B4-BE49-F238E27FC236}">
-                <a16:creationId xmlns:a16="http://schemas.microsoft.com/office/drawing/2014/main" id="{BF4DEFD2-C5E6-74D5-A805-4901F66AC3B3}"/>
+          <p:cNvPr id="1029" name="文本框 1028">
+            <a:extLst>
+              <a:ext uri="{FF2B5EF4-FFF2-40B4-BE49-F238E27FC236}">
+                <a16:creationId xmlns:a16="http://schemas.microsoft.com/office/drawing/2014/main" id="{C71E738E-300E-BC73-AFB9-CEAC58F4C29A}"/>
               </a:ext>
             </a:extLst>
           </p:cNvPr>
@@ -6158,8 +6090,8 @@
         </p:nvSpPr>
         <p:spPr>
           <a:xfrm>
-            <a:off x="6160854" y="4467121"/>
-            <a:ext cx="1669047" cy="307777"/>
+            <a:off x="3682711" y="4104242"/>
+            <a:ext cx="1930913" cy="307777"/>
           </a:xfrm>
           <a:prstGeom prst="rect">
             <a:avLst/>
@@ -6177,7 +6109,7 @@
                 <a:latin typeface="Cambria" panose="02040503050406030204" pitchFamily="18" charset="0"/>
                 <a:ea typeface="Cambria" panose="02040503050406030204" pitchFamily="18" charset="0"/>
               </a:rPr>
-              <a:t>Seed:42/123/2025</a:t>
+              <a:t>Bidirectional Mammba</a:t>
             </a:r>
             <a:endParaRPr lang="zh-CN" altLang="en-US" sz="1400">
               <a:latin typeface="Cambria" panose="02040503050406030204" pitchFamily="18" charset="0"/>
@@ -6185,6 +6117,361 @@
           </a:p>
         </p:txBody>
       </p:sp>
+      <p:sp>
+        <p:nvSpPr>
+          <p:cNvPr id="1030" name="矩形: 圆角 1029">
+            <a:extLst>
+              <a:ext uri="{FF2B5EF4-FFF2-40B4-BE49-F238E27FC236}">
+                <a16:creationId xmlns:a16="http://schemas.microsoft.com/office/drawing/2014/main" id="{B138A3C1-E46A-0D9B-AAC1-797DF31E465B}"/>
+              </a:ext>
+            </a:extLst>
+          </p:cNvPr>
+          <p:cNvSpPr/>
+          <p:nvPr/>
+        </p:nvSpPr>
+        <p:spPr>
+          <a:xfrm>
+            <a:off x="2737769" y="3174104"/>
+            <a:ext cx="975947" cy="348778"/>
+          </a:xfrm>
+          <a:prstGeom prst="roundRect">
+            <a:avLst/>
+          </a:prstGeom>
+          <a:solidFill>
+            <a:schemeClr val="accent1">
+              <a:lumMod val="20000"/>
+              <a:lumOff val="80000"/>
+            </a:schemeClr>
+          </a:solidFill>
+          <a:ln>
+            <a:gradFill>
+              <a:gsLst>
+                <a:gs pos="0">
+                  <a:schemeClr val="accent1">
+                    <a:lumMod val="5000"/>
+                    <a:lumOff val="95000"/>
+                  </a:schemeClr>
+                </a:gs>
+                <a:gs pos="74000">
+                  <a:schemeClr val="accent1">
+                    <a:lumMod val="45000"/>
+                    <a:lumOff val="55000"/>
+                  </a:schemeClr>
+                </a:gs>
+                <a:gs pos="83000">
+                  <a:schemeClr val="accent1">
+                    <a:lumMod val="45000"/>
+                    <a:lumOff val="55000"/>
+                  </a:schemeClr>
+                </a:gs>
+                <a:gs pos="100000">
+                  <a:schemeClr val="accent1">
+                    <a:lumMod val="30000"/>
+                    <a:lumOff val="70000"/>
+                  </a:schemeClr>
+                </a:gs>
+              </a:gsLst>
+              <a:lin ang="5400000" scaled="1"/>
+            </a:gradFill>
+          </a:ln>
+          <a:effectLst>
+            <a:outerShdw blurRad="50800" dist="38100" dir="2700000" algn="tl" rotWithShape="0">
+              <a:prstClr val="black">
+                <a:alpha val="40000"/>
+              </a:prstClr>
+            </a:outerShdw>
+          </a:effectLst>
+        </p:spPr>
+        <p:style>
+          <a:lnRef idx="2">
+            <a:schemeClr val="accent1">
+              <a:shade val="15000"/>
+            </a:schemeClr>
+          </a:lnRef>
+          <a:fillRef idx="1">
+            <a:schemeClr val="accent1"/>
+          </a:fillRef>
+          <a:effectRef idx="0">
+            <a:schemeClr val="accent1"/>
+          </a:effectRef>
+          <a:fontRef idx="minor">
+            <a:schemeClr val="lt1"/>
+          </a:fontRef>
+        </p:style>
+        <p:txBody>
+          <a:bodyPr rtlCol="0" anchor="ctr"/>
+          <a:lstStyle/>
+          <a:p>
+            <a:pPr algn="ctr"/>
+            <a:r>
+              <a:rPr lang="en-US" altLang="zh-CN" sz="1600">
+                <a:solidFill>
+                  <a:schemeClr val="tx1"/>
+                </a:solidFill>
+                <a:latin typeface="Cambria" panose="02040503050406030204" pitchFamily="18" charset="0"/>
+                <a:ea typeface="Cambria" panose="02040503050406030204" pitchFamily="18" charset="0"/>
+              </a:rPr>
+              <a:t>pLDDT</a:t>
+            </a:r>
+            <a:endParaRPr lang="zh-CN" altLang="en-US" sz="1600">
+              <a:solidFill>
+                <a:schemeClr val="tx1"/>
+              </a:solidFill>
+              <a:latin typeface="Cambria" panose="02040503050406030204" pitchFamily="18" charset="0"/>
+            </a:endParaRPr>
+          </a:p>
+        </p:txBody>
+      </p:sp>
+      <p:cxnSp>
+        <p:nvCxnSpPr>
+          <p:cNvPr id="1032" name="连接符: 肘形 1031">
+            <a:extLst>
+              <a:ext uri="{FF2B5EF4-FFF2-40B4-BE49-F238E27FC236}">
+                <a16:creationId xmlns:a16="http://schemas.microsoft.com/office/drawing/2014/main" id="{E720490D-CAE8-DCEE-5D9A-AECBF61B3EEA}"/>
+              </a:ext>
+            </a:extLst>
+          </p:cNvPr>
+          <p:cNvCxnSpPr>
+            <a:stCxn id="24" idx="2"/>
+            <a:endCxn id="1030" idx="1"/>
+          </p:cNvCxnSpPr>
+          <p:nvPr/>
+        </p:nvCxnSpPr>
+        <p:spPr>
+          <a:xfrm rot="16200000" flipH="1">
+            <a:off x="2445994" y="3056718"/>
+            <a:ext cx="351590" cy="231960"/>
+          </a:xfrm>
+          <a:prstGeom prst="bentConnector2">
+            <a:avLst/>
+          </a:prstGeom>
+          <a:ln>
+            <a:tailEnd type="triangle"/>
+          </a:ln>
+        </p:spPr>
+        <p:style>
+          <a:lnRef idx="2">
+            <a:schemeClr val="accent1"/>
+          </a:lnRef>
+          <a:fillRef idx="0">
+            <a:schemeClr val="accent1"/>
+          </a:fillRef>
+          <a:effectRef idx="1">
+            <a:schemeClr val="accent1"/>
+          </a:effectRef>
+          <a:fontRef idx="minor">
+            <a:schemeClr val="tx1"/>
+          </a:fontRef>
+        </p:style>
+      </p:cxnSp>
+      <p:cxnSp>
+        <p:nvCxnSpPr>
+          <p:cNvPr id="1034" name="连接符: 肘形 1033">
+            <a:extLst>
+              <a:ext uri="{FF2B5EF4-FFF2-40B4-BE49-F238E27FC236}">
+                <a16:creationId xmlns:a16="http://schemas.microsoft.com/office/drawing/2014/main" id="{D8C280BD-0FAC-F855-18A1-2FBFB24AEDB6}"/>
+              </a:ext>
+            </a:extLst>
+          </p:cNvPr>
+          <p:cNvCxnSpPr>
+            <a:cxnSpLocks/>
+            <a:stCxn id="1030" idx="3"/>
+            <a:endCxn id="58" idx="2"/>
+          </p:cNvCxnSpPr>
+          <p:nvPr/>
+        </p:nvCxnSpPr>
+        <p:spPr>
+          <a:xfrm flipV="1">
+            <a:off x="3713716" y="3036760"/>
+            <a:ext cx="3178829" cy="311733"/>
+          </a:xfrm>
+          <a:prstGeom prst="bentConnector2">
+            <a:avLst/>
+          </a:prstGeom>
+          <a:ln>
+            <a:tailEnd type="triangle"/>
+          </a:ln>
+        </p:spPr>
+        <p:style>
+          <a:lnRef idx="2">
+            <a:schemeClr val="accent1"/>
+          </a:lnRef>
+          <a:fillRef idx="0">
+            <a:schemeClr val="accent1"/>
+          </a:fillRef>
+          <a:effectRef idx="1">
+            <a:schemeClr val="accent1"/>
+          </a:effectRef>
+          <a:fontRef idx="minor">
+            <a:schemeClr val="tx1"/>
+          </a:fontRef>
+        </p:style>
+      </p:cxnSp>
+      <p:sp>
+        <p:nvSpPr>
+          <p:cNvPr id="1060" name="文本框 1059">
+            <a:extLst>
+              <a:ext uri="{FF2B5EF4-FFF2-40B4-BE49-F238E27FC236}">
+                <a16:creationId xmlns:a16="http://schemas.microsoft.com/office/drawing/2014/main" id="{0F7482FF-65E1-BBDB-8AC5-BCC61A590E27}"/>
+              </a:ext>
+            </a:extLst>
+          </p:cNvPr>
+          <p:cNvSpPr txBox="1"/>
+          <p:nvPr/>
+        </p:nvSpPr>
+        <p:spPr>
+          <a:xfrm>
+            <a:off x="1952734" y="4119631"/>
+            <a:ext cx="1172693" cy="584775"/>
+          </a:xfrm>
+          <a:prstGeom prst="rect">
+            <a:avLst/>
+          </a:prstGeom>
+          <a:noFill/>
+        </p:spPr>
+        <p:txBody>
+          <a:bodyPr wrap="none" rtlCol="0">
+            <a:spAutoFit/>
+          </a:bodyPr>
+          <a:lstStyle/>
+          <a:p>
+            <a:r>
+              <a:rPr lang="en-US" altLang="zh-CN" sz="1400">
+                <a:latin typeface="Cambria" panose="02040503050406030204" pitchFamily="18" charset="0"/>
+                <a:ea typeface="Cambria" panose="02040503050406030204" pitchFamily="18" charset="0"/>
+              </a:rPr>
+              <a:t>ProT5+LoRA</a:t>
+            </a:r>
+            <a:endParaRPr lang="zh-CN" altLang="en-US" sz="1400">
+              <a:latin typeface="Cambria" panose="02040503050406030204" pitchFamily="18" charset="0"/>
+            </a:endParaRPr>
+          </a:p>
+          <a:p>
+            <a:endParaRPr lang="zh-CN" altLang="en-US"/>
+          </a:p>
+        </p:txBody>
+      </p:sp>
+      <p:pic>
+        <p:nvPicPr>
+          <p:cNvPr id="1064" name="图片 1063">
+            <a:extLst>
+              <a:ext uri="{FF2B5EF4-FFF2-40B4-BE49-F238E27FC236}">
+                <a16:creationId xmlns:a16="http://schemas.microsoft.com/office/drawing/2014/main" id="{619F3FFB-3B82-2705-59E4-BFD45EB23635}"/>
+              </a:ext>
+            </a:extLst>
+          </p:cNvPr>
+          <p:cNvPicPr>
+            <a:picLocks noChangeAspect="1"/>
+          </p:cNvPicPr>
+          <p:nvPr/>
+        </p:nvPicPr>
+        <p:blipFill>
+          <a:blip r:embed="rId4">
+            <a:extLst>
+              <a:ext uri="{28A0092B-C50C-407E-A947-70E740481C1C}">
+                <a14:useLocalDpi xmlns:a14="http://schemas.microsoft.com/office/drawing/2010/main" val="0"/>
+              </a:ext>
+            </a:extLst>
+          </a:blip>
+          <a:stretch>
+            <a:fillRect/>
+          </a:stretch>
+        </p:blipFill>
+        <p:spPr>
+          <a:xfrm>
+            <a:off x="1698293" y="4448648"/>
+            <a:ext cx="1749561" cy="1166374"/>
+          </a:xfrm>
+          <a:prstGeom prst="rect">
+            <a:avLst/>
+          </a:prstGeom>
+        </p:spPr>
+      </p:pic>
+      <p:cxnSp>
+        <p:nvCxnSpPr>
+          <p:cNvPr id="1066" name="连接符: 肘形 1065">
+            <a:extLst>
+              <a:ext uri="{FF2B5EF4-FFF2-40B4-BE49-F238E27FC236}">
+                <a16:creationId xmlns:a16="http://schemas.microsoft.com/office/drawing/2014/main" id="{D9E4CFF4-2750-4AFF-9922-614CED910AB5}"/>
+              </a:ext>
+            </a:extLst>
+          </p:cNvPr>
+          <p:cNvCxnSpPr>
+            <a:cxnSpLocks/>
+            <a:stCxn id="12" idx="0"/>
+            <a:endCxn id="2" idx="1"/>
+          </p:cNvCxnSpPr>
+          <p:nvPr/>
+        </p:nvCxnSpPr>
+        <p:spPr>
+          <a:xfrm rot="5400000" flipH="1" flipV="1">
+            <a:off x="1240132" y="2307788"/>
+            <a:ext cx="209202" cy="570851"/>
+          </a:xfrm>
+          <a:prstGeom prst="bentConnector2">
+            <a:avLst/>
+          </a:prstGeom>
+          <a:ln>
+            <a:tailEnd type="triangle"/>
+          </a:ln>
+        </p:spPr>
+        <p:style>
+          <a:lnRef idx="2">
+            <a:schemeClr val="accent1"/>
+          </a:lnRef>
+          <a:fillRef idx="0">
+            <a:schemeClr val="accent1"/>
+          </a:fillRef>
+          <a:effectRef idx="1">
+            <a:schemeClr val="accent1"/>
+          </a:effectRef>
+          <a:fontRef idx="minor">
+            <a:schemeClr val="tx1"/>
+          </a:fontRef>
+        </p:style>
+      </p:cxnSp>
+      <p:cxnSp>
+        <p:nvCxnSpPr>
+          <p:cNvPr id="1069" name="连接符: 肘形 1068">
+            <a:extLst>
+              <a:ext uri="{FF2B5EF4-FFF2-40B4-BE49-F238E27FC236}">
+                <a16:creationId xmlns:a16="http://schemas.microsoft.com/office/drawing/2014/main" id="{AA52181B-C476-2344-D1E6-915DB2449A8D}"/>
+              </a:ext>
+            </a:extLst>
+          </p:cNvPr>
+          <p:cNvCxnSpPr>
+            <a:stCxn id="12" idx="2"/>
+            <a:endCxn id="40" idx="1"/>
+          </p:cNvCxnSpPr>
+          <p:nvPr/>
+        </p:nvCxnSpPr>
+        <p:spPr>
+          <a:xfrm rot="16200000" flipH="1">
+            <a:off x="1203998" y="4534575"/>
+            <a:ext cx="242528" cy="531908"/>
+          </a:xfrm>
+          <a:prstGeom prst="bentConnector2">
+            <a:avLst/>
+          </a:prstGeom>
+          <a:ln>
+            <a:tailEnd type="triangle"/>
+          </a:ln>
+        </p:spPr>
+        <p:style>
+          <a:lnRef idx="2">
+            <a:schemeClr val="accent1"/>
+          </a:lnRef>
+          <a:fillRef idx="0">
+            <a:schemeClr val="accent1"/>
+          </a:fillRef>
+          <a:effectRef idx="1">
+            <a:schemeClr val="accent1"/>
+          </a:effectRef>
+          <a:fontRef idx="minor">
+            <a:schemeClr val="tx1"/>
+          </a:fontRef>
+        </p:style>
+      </p:cxnSp>
     </p:spTree>
     <p:extLst>
       <p:ext uri="{BB962C8B-B14F-4D97-AF65-F5344CB8AC3E}">

--- a/架构图.pptx
+++ b/架构图.pptx
@@ -260,7 +260,7 @@
           <a:p>
             <a:fld id="{D6C62C4D-D056-4B4F-8CEF-42E495CFF63F}" type="datetimeFigureOut">
               <a:rPr lang="zh-CN" altLang="en-US" smtClean="0"/>
-              <a:t>2026/8/12</a:t>
+              <a:t>2026/8/13</a:t>
             </a:fld>
             <a:endParaRPr lang="zh-CN" altLang="en-US"/>
           </a:p>
@@ -458,7 +458,7 @@
           <a:p>
             <a:fld id="{D6C62C4D-D056-4B4F-8CEF-42E495CFF63F}" type="datetimeFigureOut">
               <a:rPr lang="zh-CN" altLang="en-US" smtClean="0"/>
-              <a:t>2026/8/12</a:t>
+              <a:t>2026/8/13</a:t>
             </a:fld>
             <a:endParaRPr lang="zh-CN" altLang="en-US"/>
           </a:p>
@@ -666,7 +666,7 @@
           <a:p>
             <a:fld id="{D6C62C4D-D056-4B4F-8CEF-42E495CFF63F}" type="datetimeFigureOut">
               <a:rPr lang="zh-CN" altLang="en-US" smtClean="0"/>
-              <a:t>2026/8/12</a:t>
+              <a:t>2026/8/13</a:t>
             </a:fld>
             <a:endParaRPr lang="zh-CN" altLang="en-US"/>
           </a:p>
@@ -864,7 +864,7 @@
           <a:p>
             <a:fld id="{D6C62C4D-D056-4B4F-8CEF-42E495CFF63F}" type="datetimeFigureOut">
               <a:rPr lang="zh-CN" altLang="en-US" smtClean="0"/>
-              <a:t>2026/8/12</a:t>
+              <a:t>2026/8/13</a:t>
             </a:fld>
             <a:endParaRPr lang="zh-CN" altLang="en-US"/>
           </a:p>
@@ -1139,7 +1139,7 @@
           <a:p>
             <a:fld id="{D6C62C4D-D056-4B4F-8CEF-42E495CFF63F}" type="datetimeFigureOut">
               <a:rPr lang="zh-CN" altLang="en-US" smtClean="0"/>
-              <a:t>2026/8/12</a:t>
+              <a:t>2026/8/13</a:t>
             </a:fld>
             <a:endParaRPr lang="zh-CN" altLang="en-US"/>
           </a:p>
@@ -1404,7 +1404,7 @@
           <a:p>
             <a:fld id="{D6C62C4D-D056-4B4F-8CEF-42E495CFF63F}" type="datetimeFigureOut">
               <a:rPr lang="zh-CN" altLang="en-US" smtClean="0"/>
-              <a:t>2026/8/12</a:t>
+              <a:t>2026/8/13</a:t>
             </a:fld>
             <a:endParaRPr lang="zh-CN" altLang="en-US"/>
           </a:p>
@@ -1816,7 +1816,7 @@
           <a:p>
             <a:fld id="{D6C62C4D-D056-4B4F-8CEF-42E495CFF63F}" type="datetimeFigureOut">
               <a:rPr lang="zh-CN" altLang="en-US" smtClean="0"/>
-              <a:t>2026/8/12</a:t>
+              <a:t>2026/8/13</a:t>
             </a:fld>
             <a:endParaRPr lang="zh-CN" altLang="en-US"/>
           </a:p>
@@ -1957,7 +1957,7 @@
           <a:p>
             <a:fld id="{D6C62C4D-D056-4B4F-8CEF-42E495CFF63F}" type="datetimeFigureOut">
               <a:rPr lang="zh-CN" altLang="en-US" smtClean="0"/>
-              <a:t>2026/8/12</a:t>
+              <a:t>2026/8/13</a:t>
             </a:fld>
             <a:endParaRPr lang="zh-CN" altLang="en-US"/>
           </a:p>
@@ -2070,7 +2070,7 @@
           <a:p>
             <a:fld id="{D6C62C4D-D056-4B4F-8CEF-42E495CFF63F}" type="datetimeFigureOut">
               <a:rPr lang="zh-CN" altLang="en-US" smtClean="0"/>
-              <a:t>2026/8/12</a:t>
+              <a:t>2026/8/13</a:t>
             </a:fld>
             <a:endParaRPr lang="zh-CN" altLang="en-US"/>
           </a:p>
@@ -2381,7 +2381,7 @@
           <a:p>
             <a:fld id="{D6C62C4D-D056-4B4F-8CEF-42E495CFF63F}" type="datetimeFigureOut">
               <a:rPr lang="zh-CN" altLang="en-US" smtClean="0"/>
-              <a:t>2026/8/12</a:t>
+              <a:t>2026/8/13</a:t>
             </a:fld>
             <a:endParaRPr lang="zh-CN" altLang="en-US"/>
           </a:p>
@@ -2669,7 +2669,7 @@
           <a:p>
             <a:fld id="{D6C62C4D-D056-4B4F-8CEF-42E495CFF63F}" type="datetimeFigureOut">
               <a:rPr lang="zh-CN" altLang="en-US" smtClean="0"/>
-              <a:t>2026/8/12</a:t>
+              <a:t>2026/8/13</a:t>
             </a:fld>
             <a:endParaRPr lang="zh-CN" altLang="en-US"/>
           </a:p>
@@ -2910,7 +2910,7 @@
           <a:p>
             <a:fld id="{D6C62C4D-D056-4B4F-8CEF-42E495CFF63F}" type="datetimeFigureOut">
               <a:rPr lang="zh-CN" altLang="en-US" smtClean="0"/>
-              <a:t>2026/8/12</a:t>
+              <a:t>2026/8/13</a:t>
             </a:fld>
             <a:endParaRPr lang="zh-CN" altLang="en-US"/>
           </a:p>
@@ -6090,8 +6090,8 @@
         </p:nvSpPr>
         <p:spPr>
           <a:xfrm>
-            <a:off x="3682711" y="4104242"/>
-            <a:ext cx="1930913" cy="307777"/>
+            <a:off x="3757251" y="4114466"/>
+            <a:ext cx="1781834" cy="307777"/>
           </a:xfrm>
           <a:prstGeom prst="rect">
             <a:avLst/>
@@ -6109,7 +6109,7 @@
                 <a:latin typeface="Cambria" panose="02040503050406030204" pitchFamily="18" charset="0"/>
                 <a:ea typeface="Cambria" panose="02040503050406030204" pitchFamily="18" charset="0"/>
               </a:rPr>
-              <a:t>Bidirectional Mammba</a:t>
+              <a:t>Bidirectional Mamba</a:t>
             </a:r>
             <a:endParaRPr lang="zh-CN" altLang="en-US" sz="1400">
               <a:latin typeface="Cambria" panose="02040503050406030204" pitchFamily="18" charset="0"/>
